--- a/PITCH PRESENTACIÓN FINAL_PRE_FILL_BACKUP.pptx
+++ b/PITCH PRESENTACIÓN FINAL_PRE_FILL_BACKUP.pptx
@@ -121,6 +121,234 @@
     </p:ext>
   </p:extLst>
 </p:presentation>
+</file>
+
+<file path=ppt/revisionInfo.xml><?xml version="1.0" encoding="utf-8"?>
+<p1510:revInfo xmlns:a="http://schemas.openxmlformats.org/drawingml/2006/main" xmlns:r="http://schemas.openxmlformats.org/officeDocument/2006/relationships" xmlns:p1510="http://schemas.microsoft.com/office/powerpoint/2015/10/main">
+  <p1510:revLst>
+    <p1510:client id="{AB654049-4B0C-4E25-A5CB-EB923E0DE5AF}" v="28" dt="2026-10-26T14:36:52.775"/>
+  </p1510:revLst>
+</p1510:revInfo>
+</file>
+
+<file path=ppt/changesInfos/changesInfo1.xml><?xml version="1.0" encoding="utf-8"?>
+<pc:chgInfo xmlns:a="http://schemas.openxmlformats.org/drawingml/2006/main" xmlns:r="http://schemas.openxmlformats.org/officeDocument/2006/relationships" xmlns:ac="http://schemas.microsoft.com/office/drawing/2013/main/command" xmlns:pc="http://schemas.microsoft.com/office/powerpoint/2013/main/command">
+  <pc:docChgLst>
+    <pc:chgData name="Diego Tapia Salazar" userId="c3d00bcd4006f853" providerId="LiveId" clId="{2F6D9AE4-852D-4580-BFBD-4043B69AEE08}"/>
+    <pc:docChg chg="custSel modSld">
+      <pc:chgData name="Diego Tapia Salazar" userId="c3d00bcd4006f853" providerId="LiveId" clId="{2F6D9AE4-852D-4580-BFBD-4043B69AEE08}" dt="2026-10-26T14:37:30.721" v="222" actId="20577"/>
+      <pc:docMkLst>
+        <pc:docMk/>
+      </pc:docMkLst>
+      <pc:sldChg chg="addSp delSp modSp mod">
+        <pc:chgData name="Diego Tapia Salazar" userId="c3d00bcd4006f853" providerId="LiveId" clId="{2F6D9AE4-852D-4580-BFBD-4043B69AEE08}" dt="2026-10-26T12:57:54.889" v="16" actId="1076"/>
+        <pc:sldMkLst>
+          <pc:docMk/>
+          <pc:sldMk cId="761353708" sldId="257"/>
+        </pc:sldMkLst>
+        <pc:spChg chg="mod">
+          <ac:chgData name="Diego Tapia Salazar" userId="c3d00bcd4006f853" providerId="LiveId" clId="{2F6D9AE4-852D-4580-BFBD-4043B69AEE08}" dt="2026-10-26T12:57:51.532" v="15" actId="113"/>
+          <ac:spMkLst>
+            <pc:docMk/>
+            <pc:sldMk cId="761353708" sldId="257"/>
+            <ac:spMk id="8" creationId="{228E093B-7D1A-CF30-2129-9B73858E5B70}"/>
+          </ac:spMkLst>
+        </pc:spChg>
+        <pc:picChg chg="add mod">
+          <ac:chgData name="Diego Tapia Salazar" userId="c3d00bcd4006f853" providerId="LiveId" clId="{2F6D9AE4-852D-4580-BFBD-4043B69AEE08}" dt="2026-10-26T12:57:54.889" v="16" actId="1076"/>
+          <ac:picMkLst>
+            <pc:docMk/>
+            <pc:sldMk cId="761353708" sldId="257"/>
+            <ac:picMk id="2" creationId="{1FEF09E1-F959-69E8-5FE3-A7FA46E0CBB0}"/>
+          </ac:picMkLst>
+        </pc:picChg>
+        <pc:picChg chg="del">
+          <ac:chgData name="Diego Tapia Salazar" userId="c3d00bcd4006f853" providerId="LiveId" clId="{2F6D9AE4-852D-4580-BFBD-4043B69AEE08}" dt="2026-10-26T12:56:33.806" v="0" actId="478"/>
+          <ac:picMkLst>
+            <pc:docMk/>
+            <pc:sldMk cId="761353708" sldId="257"/>
+            <ac:picMk id="7" creationId="{52B1F841-6C16-EEAE-014D-C52589575C4B}"/>
+          </ac:picMkLst>
+        </pc:picChg>
+      </pc:sldChg>
+      <pc:sldChg chg="modSp mod">
+        <pc:chgData name="Diego Tapia Salazar" userId="c3d00bcd4006f853" providerId="LiveId" clId="{2F6D9AE4-852D-4580-BFBD-4043B69AEE08}" dt="2026-10-26T13:00:05.199" v="42" actId="20577"/>
+        <pc:sldMkLst>
+          <pc:docMk/>
+          <pc:sldMk cId="1505387986" sldId="258"/>
+        </pc:sldMkLst>
+        <pc:spChg chg="mod">
+          <ac:chgData name="Diego Tapia Salazar" userId="c3d00bcd4006f853" providerId="LiveId" clId="{2F6D9AE4-852D-4580-BFBD-4043B69AEE08}" dt="2026-10-26T13:00:05.199" v="42" actId="20577"/>
+          <ac:spMkLst>
+            <pc:docMk/>
+            <pc:sldMk cId="1505387986" sldId="258"/>
+            <ac:spMk id="8" creationId="{A1ADAF66-BBF4-2551-FEBA-8696230E3334}"/>
+          </ac:spMkLst>
+        </pc:spChg>
+      </pc:sldChg>
+      <pc:sldChg chg="modSp mod">
+        <pc:chgData name="Diego Tapia Salazar" userId="c3d00bcd4006f853" providerId="LiveId" clId="{2F6D9AE4-852D-4580-BFBD-4043B69AEE08}" dt="2026-10-26T14:11:18.148" v="55" actId="1076"/>
+        <pc:sldMkLst>
+          <pc:docMk/>
+          <pc:sldMk cId="3337777894" sldId="259"/>
+        </pc:sldMkLst>
+        <pc:spChg chg="mod">
+          <ac:chgData name="Diego Tapia Salazar" userId="c3d00bcd4006f853" providerId="LiveId" clId="{2F6D9AE4-852D-4580-BFBD-4043B69AEE08}" dt="2026-10-26T14:11:14.791" v="54" actId="14100"/>
+          <ac:spMkLst>
+            <pc:docMk/>
+            <pc:sldMk cId="3337777894" sldId="259"/>
+            <ac:spMk id="5" creationId="{EE565427-C35C-C4BC-80D7-BDEEBD856B23}"/>
+          </ac:spMkLst>
+        </pc:spChg>
+        <pc:picChg chg="mod">
+          <ac:chgData name="Diego Tapia Salazar" userId="c3d00bcd4006f853" providerId="LiveId" clId="{2F6D9AE4-852D-4580-BFBD-4043B69AEE08}" dt="2026-10-26T14:11:18.148" v="55" actId="1076"/>
+          <ac:picMkLst>
+            <pc:docMk/>
+            <pc:sldMk cId="3337777894" sldId="259"/>
+            <ac:picMk id="6" creationId="{693E4186-FD37-0EC8-F85D-62F35F6B7FA1}"/>
+          </ac:picMkLst>
+        </pc:picChg>
+      </pc:sldChg>
+      <pc:sldChg chg="modSp mod">
+        <pc:chgData name="Diego Tapia Salazar" userId="c3d00bcd4006f853" providerId="LiveId" clId="{2F6D9AE4-852D-4580-BFBD-4043B69AEE08}" dt="2026-10-26T14:15:14.274" v="78" actId="20577"/>
+        <pc:sldMkLst>
+          <pc:docMk/>
+          <pc:sldMk cId="2182861095" sldId="260"/>
+        </pc:sldMkLst>
+        <pc:spChg chg="mod">
+          <ac:chgData name="Diego Tapia Salazar" userId="c3d00bcd4006f853" providerId="LiveId" clId="{2F6D9AE4-852D-4580-BFBD-4043B69AEE08}" dt="2026-10-26T14:13:52.980" v="60" actId="1076"/>
+          <ac:spMkLst>
+            <pc:docMk/>
+            <pc:sldMk cId="2182861095" sldId="260"/>
+            <ac:spMk id="6" creationId="{01A26676-B25E-6AE6-4EFC-430FA882C922}"/>
+          </ac:spMkLst>
+        </pc:spChg>
+        <pc:spChg chg="mod">
+          <ac:chgData name="Diego Tapia Salazar" userId="c3d00bcd4006f853" providerId="LiveId" clId="{2F6D9AE4-852D-4580-BFBD-4043B69AEE08}" dt="2026-10-26T14:15:14.274" v="78" actId="20577"/>
+          <ac:spMkLst>
+            <pc:docMk/>
+            <pc:sldMk cId="2182861095" sldId="260"/>
+            <ac:spMk id="8" creationId="{B967FA2C-2F62-407B-5362-4D824CD617B9}"/>
+          </ac:spMkLst>
+        </pc:spChg>
+      </pc:sldChg>
+      <pc:sldChg chg="modSp mod">
+        <pc:chgData name="Diego Tapia Salazar" userId="c3d00bcd4006f853" providerId="LiveId" clId="{2F6D9AE4-852D-4580-BFBD-4043B69AEE08}" dt="2026-10-26T14:16:35.107" v="82" actId="20577"/>
+        <pc:sldMkLst>
+          <pc:docMk/>
+          <pc:sldMk cId="3538067603" sldId="261"/>
+        </pc:sldMkLst>
+        <pc:spChg chg="mod">
+          <ac:chgData name="Diego Tapia Salazar" userId="c3d00bcd4006f853" providerId="LiveId" clId="{2F6D9AE4-852D-4580-BFBD-4043B69AEE08}" dt="2026-10-26T14:16:35.107" v="82" actId="20577"/>
+          <ac:spMkLst>
+            <pc:docMk/>
+            <pc:sldMk cId="3538067603" sldId="261"/>
+            <ac:spMk id="7" creationId="{719C1B9D-21A6-BF3B-9588-49A38869AA0F}"/>
+          </ac:spMkLst>
+        </pc:spChg>
+      </pc:sldChg>
+      <pc:sldChg chg="modSp mod">
+        <pc:chgData name="Diego Tapia Salazar" userId="c3d00bcd4006f853" providerId="LiveId" clId="{2F6D9AE4-852D-4580-BFBD-4043B69AEE08}" dt="2026-10-26T14:20:10.102" v="108" actId="20577"/>
+        <pc:sldMkLst>
+          <pc:docMk/>
+          <pc:sldMk cId="338082649" sldId="262"/>
+        </pc:sldMkLst>
+        <pc:spChg chg="mod">
+          <ac:chgData name="Diego Tapia Salazar" userId="c3d00bcd4006f853" providerId="LiveId" clId="{2F6D9AE4-852D-4580-BFBD-4043B69AEE08}" dt="2026-10-26T14:20:10.102" v="108" actId="20577"/>
+          <ac:spMkLst>
+            <pc:docMk/>
+            <pc:sldMk cId="338082649" sldId="262"/>
+            <ac:spMk id="7" creationId="{10B15E8F-FB46-F612-14ED-26A4F6A040E2}"/>
+          </ac:spMkLst>
+        </pc:spChg>
+      </pc:sldChg>
+      <pc:sldChg chg="modSp mod">
+        <pc:chgData name="Diego Tapia Salazar" userId="c3d00bcd4006f853" providerId="LiveId" clId="{2F6D9AE4-852D-4580-BFBD-4043B69AEE08}" dt="2026-10-26T14:30:09.662" v="160" actId="14100"/>
+        <pc:sldMkLst>
+          <pc:docMk/>
+          <pc:sldMk cId="1007010683" sldId="263"/>
+        </pc:sldMkLst>
+        <pc:spChg chg="mod">
+          <ac:chgData name="Diego Tapia Salazar" userId="c3d00bcd4006f853" providerId="LiveId" clId="{2F6D9AE4-852D-4580-BFBD-4043B69AEE08}" dt="2026-10-26T14:30:09.662" v="160" actId="14100"/>
+          <ac:spMkLst>
+            <pc:docMk/>
+            <pc:sldMk cId="1007010683" sldId="263"/>
+            <ac:spMk id="6" creationId="{16B957C2-EFB5-82CD-42E4-4FBA9128CAAF}"/>
+          </ac:spMkLst>
+        </pc:spChg>
+      </pc:sldChg>
+      <pc:sldChg chg="modSp mod">
+        <pc:chgData name="Diego Tapia Salazar" userId="c3d00bcd4006f853" providerId="LiveId" clId="{2F6D9AE4-852D-4580-BFBD-4043B69AEE08}" dt="2026-10-26T14:32:26.594" v="189" actId="20577"/>
+        <pc:sldMkLst>
+          <pc:docMk/>
+          <pc:sldMk cId="4062902961" sldId="264"/>
+        </pc:sldMkLst>
+        <pc:spChg chg="mod">
+          <ac:chgData name="Diego Tapia Salazar" userId="c3d00bcd4006f853" providerId="LiveId" clId="{2F6D9AE4-852D-4580-BFBD-4043B69AEE08}" dt="2026-10-26T14:31:42.229" v="175" actId="1076"/>
+          <ac:spMkLst>
+            <pc:docMk/>
+            <pc:sldMk cId="4062902961" sldId="264"/>
+            <ac:spMk id="5" creationId="{4044E463-F927-1DBB-1BAE-349FDD127C56}"/>
+          </ac:spMkLst>
+        </pc:spChg>
+        <pc:spChg chg="mod">
+          <ac:chgData name="Diego Tapia Salazar" userId="c3d00bcd4006f853" providerId="LiveId" clId="{2F6D9AE4-852D-4580-BFBD-4043B69AEE08}" dt="2026-10-26T14:32:26.594" v="189" actId="20577"/>
+          <ac:spMkLst>
+            <pc:docMk/>
+            <pc:sldMk cId="4062902961" sldId="264"/>
+            <ac:spMk id="7" creationId="{026DFBB9-C332-5BE1-CB61-B5980EC414FB}"/>
+          </ac:spMkLst>
+        </pc:spChg>
+      </pc:sldChg>
+      <pc:sldChg chg="addSp delSp modSp mod">
+        <pc:chgData name="Diego Tapia Salazar" userId="c3d00bcd4006f853" providerId="LiveId" clId="{2F6D9AE4-852D-4580-BFBD-4043B69AEE08}" dt="2026-10-26T14:34:22.868" v="208" actId="20577"/>
+        <pc:sldMkLst>
+          <pc:docMk/>
+          <pc:sldMk cId="301872852" sldId="265"/>
+        </pc:sldMkLst>
+        <pc:spChg chg="del">
+          <ac:chgData name="Diego Tapia Salazar" userId="c3d00bcd4006f853" providerId="LiveId" clId="{2F6D9AE4-852D-4580-BFBD-4043B69AEE08}" dt="2026-10-26T14:33:46.211" v="191" actId="478"/>
+          <ac:spMkLst>
+            <pc:docMk/>
+            <pc:sldMk cId="301872852" sldId="265"/>
+            <ac:spMk id="8" creationId="{7A3F4DB9-7D60-9ABC-1299-A85413CA55EB}"/>
+          </ac:spMkLst>
+        </pc:spChg>
+        <pc:graphicFrameChg chg="add mod modGraphic">
+          <ac:chgData name="Diego Tapia Salazar" userId="c3d00bcd4006f853" providerId="LiveId" clId="{2F6D9AE4-852D-4580-BFBD-4043B69AEE08}" dt="2026-10-26T14:34:22.868" v="208" actId="20577"/>
+          <ac:graphicFrameMkLst>
+            <pc:docMk/>
+            <pc:sldMk cId="301872852" sldId="265"/>
+            <ac:graphicFrameMk id="2" creationId="{B6EBA026-DF03-BC5C-A813-9CD07CD201A5}"/>
+          </ac:graphicFrameMkLst>
+        </pc:graphicFrameChg>
+        <pc:picChg chg="del">
+          <ac:chgData name="Diego Tapia Salazar" userId="c3d00bcd4006f853" providerId="LiveId" clId="{2F6D9AE4-852D-4580-BFBD-4043B69AEE08}" dt="2026-10-26T14:33:47.798" v="192" actId="478"/>
+          <ac:picMkLst>
+            <pc:docMk/>
+            <pc:sldMk cId="301872852" sldId="265"/>
+            <ac:picMk id="9" creationId="{6466F96B-EEE3-2CE5-46B0-CBB1E7C4641B}"/>
+          </ac:picMkLst>
+        </pc:picChg>
+      </pc:sldChg>
+      <pc:sldChg chg="modSp mod">
+        <pc:chgData name="Diego Tapia Salazar" userId="c3d00bcd4006f853" providerId="LiveId" clId="{2F6D9AE4-852D-4580-BFBD-4043B69AEE08}" dt="2026-10-26T14:37:30.721" v="222" actId="20577"/>
+        <pc:sldMkLst>
+          <pc:docMk/>
+          <pc:sldMk cId="3815329617" sldId="266"/>
+        </pc:sldMkLst>
+        <pc:spChg chg="mod">
+          <ac:chgData name="Diego Tapia Salazar" userId="c3d00bcd4006f853" providerId="LiveId" clId="{2F6D9AE4-852D-4580-BFBD-4043B69AEE08}" dt="2026-10-26T14:37:30.721" v="222" actId="20577"/>
+          <ac:spMkLst>
+            <pc:docMk/>
+            <pc:sldMk cId="3815329617" sldId="266"/>
+            <ac:spMk id="11" creationId="{A90BA074-C5E7-ACB1-247E-5A4998860430}"/>
+          </ac:spMkLst>
+        </pc:spChg>
+      </pc:sldChg>
+    </pc:docChg>
+  </pc:docChgLst>
+</pc:chgInfo>
 </file>
 
 <file path=ppt/diagrams/colors1.xml><?xml version="1.0" encoding="utf-8"?>
@@ -1412,13 +1640,6 @@
         </dgm:presLayoutVars>
       </dgm:prSet>
       <dgm:spPr/>
-      <dgm:t>
-        <a:bodyPr/>
-        <a:lstStyle/>
-        <a:p>
-          <a:endParaRPr lang="es-ES"/>
-        </a:p>
-      </dgm:t>
     </dgm:pt>
     <dgm:pt modelId="{7553334A-46BC-496D-AD66-04BC3B4CFE45}" type="pres">
       <dgm:prSet presAssocID="{A7C14BFC-42FD-484E-A7DC-C81B0C13922D}" presName="dummy" presStyleCnt="0"/>
@@ -1431,24 +1652,10 @@
         </dgm:presLayoutVars>
       </dgm:prSet>
       <dgm:spPr/>
-      <dgm:t>
-        <a:bodyPr/>
-        <a:lstStyle/>
-        <a:p>
-          <a:endParaRPr lang="es-ES"/>
-        </a:p>
-      </dgm:t>
     </dgm:pt>
     <dgm:pt modelId="{6E13AB0A-5338-43D8-B58F-44F7F16C54D7}" type="pres">
       <dgm:prSet presAssocID="{3E45865D-2544-4A4A-824E-AB2F19DC12D1}" presName="sibTrans" presStyleLbl="node1" presStyleIdx="0" presStyleCnt="10"/>
       <dgm:spPr/>
-      <dgm:t>
-        <a:bodyPr/>
-        <a:lstStyle/>
-        <a:p>
-          <a:endParaRPr lang="es-ES"/>
-        </a:p>
-      </dgm:t>
     </dgm:pt>
     <dgm:pt modelId="{01F90C7E-170C-408F-BBD0-08B3EC1512B8}" type="pres">
       <dgm:prSet presAssocID="{034CDE8E-B2A9-4E1E-B64A-904B09C20502}" presName="dummy" presStyleCnt="0"/>
@@ -1461,24 +1668,10 @@
         </dgm:presLayoutVars>
       </dgm:prSet>
       <dgm:spPr/>
-      <dgm:t>
-        <a:bodyPr/>
-        <a:lstStyle/>
-        <a:p>
-          <a:endParaRPr lang="es-ES"/>
-        </a:p>
-      </dgm:t>
     </dgm:pt>
     <dgm:pt modelId="{C5A28ECE-5F95-4A81-8113-75DC5544F906}" type="pres">
       <dgm:prSet presAssocID="{898D1AD8-C62B-4760-BBB3-CFFA028EEDA8}" presName="sibTrans" presStyleLbl="node1" presStyleIdx="1" presStyleCnt="10"/>
       <dgm:spPr/>
-      <dgm:t>
-        <a:bodyPr/>
-        <a:lstStyle/>
-        <a:p>
-          <a:endParaRPr lang="es-ES"/>
-        </a:p>
-      </dgm:t>
     </dgm:pt>
     <dgm:pt modelId="{88C4B6AB-74EB-4C33-AEC2-F873BE56C77E}" type="pres">
       <dgm:prSet presAssocID="{187513CB-0041-48B1-8C3C-3793F176A38C}" presName="dummy" presStyleCnt="0"/>
@@ -1491,24 +1684,10 @@
         </dgm:presLayoutVars>
       </dgm:prSet>
       <dgm:spPr/>
-      <dgm:t>
-        <a:bodyPr/>
-        <a:lstStyle/>
-        <a:p>
-          <a:endParaRPr lang="es-ES"/>
-        </a:p>
-      </dgm:t>
     </dgm:pt>
     <dgm:pt modelId="{4CFAF20E-2CE9-410D-8C4F-99A003CC7A05}" type="pres">
       <dgm:prSet presAssocID="{91AF92F1-664C-44A9-A9AF-60B4FDE9F772}" presName="sibTrans" presStyleLbl="node1" presStyleIdx="2" presStyleCnt="10"/>
       <dgm:spPr/>
-      <dgm:t>
-        <a:bodyPr/>
-        <a:lstStyle/>
-        <a:p>
-          <a:endParaRPr lang="es-ES"/>
-        </a:p>
-      </dgm:t>
     </dgm:pt>
     <dgm:pt modelId="{14BA54F5-845B-4279-9CE6-EE3BF42F5D6D}" type="pres">
       <dgm:prSet presAssocID="{D45A3878-E47B-4C2C-B18F-233FC4AF1D5A}" presName="dummy" presStyleCnt="0"/>
@@ -1521,24 +1700,10 @@
         </dgm:presLayoutVars>
       </dgm:prSet>
       <dgm:spPr/>
-      <dgm:t>
-        <a:bodyPr/>
-        <a:lstStyle/>
-        <a:p>
-          <a:endParaRPr lang="es-ES"/>
-        </a:p>
-      </dgm:t>
     </dgm:pt>
     <dgm:pt modelId="{AC31F8FC-833D-4CF5-AD19-1119055ECA89}" type="pres">
       <dgm:prSet presAssocID="{8EAD4F29-F68F-440D-BADC-DC6F8819E824}" presName="sibTrans" presStyleLbl="node1" presStyleIdx="3" presStyleCnt="10"/>
       <dgm:spPr/>
-      <dgm:t>
-        <a:bodyPr/>
-        <a:lstStyle/>
-        <a:p>
-          <a:endParaRPr lang="es-ES"/>
-        </a:p>
-      </dgm:t>
     </dgm:pt>
     <dgm:pt modelId="{4196D907-CD02-48D9-B960-003FFDCA0085}" type="pres">
       <dgm:prSet presAssocID="{1A7A6048-8D1E-4CCB-AB57-A75B91002020}" presName="dummy" presStyleCnt="0"/>
@@ -1551,24 +1716,10 @@
         </dgm:presLayoutVars>
       </dgm:prSet>
       <dgm:spPr/>
-      <dgm:t>
-        <a:bodyPr/>
-        <a:lstStyle/>
-        <a:p>
-          <a:endParaRPr lang="es-ES"/>
-        </a:p>
-      </dgm:t>
     </dgm:pt>
     <dgm:pt modelId="{08A8699B-3356-4B7B-86C7-BB255DDA25C7}" type="pres">
       <dgm:prSet presAssocID="{479B4475-028B-49AA-B2F9-90BDBEE58BE0}" presName="sibTrans" presStyleLbl="node1" presStyleIdx="4" presStyleCnt="10"/>
       <dgm:spPr/>
-      <dgm:t>
-        <a:bodyPr/>
-        <a:lstStyle/>
-        <a:p>
-          <a:endParaRPr lang="es-ES"/>
-        </a:p>
-      </dgm:t>
     </dgm:pt>
     <dgm:pt modelId="{2D917792-A278-42C5-B9B9-E43B90B8C142}" type="pres">
       <dgm:prSet presAssocID="{5A04C44D-C0E1-4B13-8EC9-A0528D875B47}" presName="dummy" presStyleCnt="0"/>
@@ -1581,24 +1732,10 @@
         </dgm:presLayoutVars>
       </dgm:prSet>
       <dgm:spPr/>
-      <dgm:t>
-        <a:bodyPr/>
-        <a:lstStyle/>
-        <a:p>
-          <a:endParaRPr lang="es-ES"/>
-        </a:p>
-      </dgm:t>
     </dgm:pt>
     <dgm:pt modelId="{DC6AC8A5-37C0-4DE2-B2BE-410A5BFD8F16}" type="pres">
       <dgm:prSet presAssocID="{B353A3A0-4BB2-47F8-8660-F5F68DEBB45B}" presName="sibTrans" presStyleLbl="node1" presStyleIdx="5" presStyleCnt="10" custScaleX="120544" custScaleY="96035"/>
       <dgm:spPr/>
-      <dgm:t>
-        <a:bodyPr/>
-        <a:lstStyle/>
-        <a:p>
-          <a:endParaRPr lang="es-ES"/>
-        </a:p>
-      </dgm:t>
     </dgm:pt>
     <dgm:pt modelId="{2F0D8111-9349-4F5B-A135-6790DAD0F65C}" type="pres">
       <dgm:prSet presAssocID="{DDF5495A-ED8F-4CBF-90AA-52E91B0F974D}" presName="dummy" presStyleCnt="0"/>
@@ -1611,24 +1748,10 @@
         </dgm:presLayoutVars>
       </dgm:prSet>
       <dgm:spPr/>
-      <dgm:t>
-        <a:bodyPr/>
-        <a:lstStyle/>
-        <a:p>
-          <a:endParaRPr lang="es-ES"/>
-        </a:p>
-      </dgm:t>
     </dgm:pt>
     <dgm:pt modelId="{0D57837E-456A-47B7-93E4-3ADD42796347}" type="pres">
       <dgm:prSet presAssocID="{2643CB98-36A8-4012-B2DC-54D795A23F8E}" presName="sibTrans" presStyleLbl="node1" presStyleIdx="6" presStyleCnt="10"/>
       <dgm:spPr/>
-      <dgm:t>
-        <a:bodyPr/>
-        <a:lstStyle/>
-        <a:p>
-          <a:endParaRPr lang="es-ES"/>
-        </a:p>
-      </dgm:t>
     </dgm:pt>
     <dgm:pt modelId="{C5460AA0-0973-44A5-A62B-DF756CD6918B}" type="pres">
       <dgm:prSet presAssocID="{6BE05E82-0788-434F-8F1F-766CCBB53E26}" presName="dummy" presStyleCnt="0"/>
@@ -1641,24 +1764,10 @@
         </dgm:presLayoutVars>
       </dgm:prSet>
       <dgm:spPr/>
-      <dgm:t>
-        <a:bodyPr/>
-        <a:lstStyle/>
-        <a:p>
-          <a:endParaRPr lang="es-ES"/>
-        </a:p>
-      </dgm:t>
     </dgm:pt>
     <dgm:pt modelId="{D0D498C8-D633-4DAB-A232-DDE8FFFB5F15}" type="pres">
       <dgm:prSet presAssocID="{CBBF1D43-21BB-410C-AC6C-70C1D793650C}" presName="sibTrans" presStyleLbl="node1" presStyleIdx="7" presStyleCnt="10"/>
       <dgm:spPr/>
-      <dgm:t>
-        <a:bodyPr/>
-        <a:lstStyle/>
-        <a:p>
-          <a:endParaRPr lang="es-ES"/>
-        </a:p>
-      </dgm:t>
     </dgm:pt>
     <dgm:pt modelId="{61420328-E97A-4C20-AE5E-71DE1D92F3FB}" type="pres">
       <dgm:prSet presAssocID="{2876A3AF-B4F2-4DB1-8BAA-28B5221EB7CB}" presName="dummy" presStyleCnt="0"/>
@@ -1671,24 +1780,10 @@
         </dgm:presLayoutVars>
       </dgm:prSet>
       <dgm:spPr/>
-      <dgm:t>
-        <a:bodyPr/>
-        <a:lstStyle/>
-        <a:p>
-          <a:endParaRPr lang="es-ES"/>
-        </a:p>
-      </dgm:t>
     </dgm:pt>
     <dgm:pt modelId="{B33A4974-B8FC-4117-BB7D-FCAC4975A154}" type="pres">
       <dgm:prSet presAssocID="{A2344B46-04F2-4FB8-876F-797A525BBF96}" presName="sibTrans" presStyleLbl="node1" presStyleIdx="8" presStyleCnt="10"/>
       <dgm:spPr/>
-      <dgm:t>
-        <a:bodyPr/>
-        <a:lstStyle/>
-        <a:p>
-          <a:endParaRPr lang="es-ES"/>
-        </a:p>
-      </dgm:t>
     </dgm:pt>
     <dgm:pt modelId="{DFE84411-DF4A-4838-B368-37F058FB850F}" type="pres">
       <dgm:prSet presAssocID="{A6444D54-FA08-4C85-877A-BC5406CF4EBD}" presName="dummy" presStyleCnt="0"/>
@@ -1701,58 +1796,44 @@
         </dgm:presLayoutVars>
       </dgm:prSet>
       <dgm:spPr/>
-      <dgm:t>
-        <a:bodyPr/>
-        <a:lstStyle/>
-        <a:p>
-          <a:endParaRPr lang="es-ES"/>
-        </a:p>
-      </dgm:t>
     </dgm:pt>
     <dgm:pt modelId="{967C72B1-2C49-4884-AC8E-83A3A1C4B2E6}" type="pres">
       <dgm:prSet presAssocID="{39EECDCD-7E5A-49DB-BF25-D0428A85E907}" presName="sibTrans" presStyleLbl="node1" presStyleIdx="9" presStyleCnt="10"/>
       <dgm:spPr/>
-      <dgm:t>
-        <a:bodyPr/>
-        <a:lstStyle/>
-        <a:p>
-          <a:endParaRPr lang="es-ES"/>
-        </a:p>
-      </dgm:t>
     </dgm:pt>
   </dgm:ptLst>
   <dgm:cxnLst>
+    <dgm:cxn modelId="{52915F01-4A3E-45AE-8B8A-7CF962986823}" type="presOf" srcId="{DDF5495A-ED8F-4CBF-90AA-52E91B0F974D}" destId="{30E18A30-8612-448E-9FCD-A4E8B810D55A}" srcOrd="0" destOrd="0" presId="urn:microsoft.com/office/officeart/2005/8/layout/cycle1"/>
+    <dgm:cxn modelId="{D70C1D1C-0F1F-4E43-B064-500B47324612}" srcId="{05E15462-8F3D-4C51-9038-72DEFD295ECB}" destId="{5A04C44D-C0E1-4B13-8EC9-A0528D875B47}" srcOrd="5" destOrd="0" parTransId="{735D546D-7B51-4C90-B5B8-F431DF17EC4C}" sibTransId="{B353A3A0-4BB2-47F8-8660-F5F68DEBB45B}"/>
+    <dgm:cxn modelId="{C0A0F42D-308F-4B81-8F79-03A4FF870FBE}" type="presOf" srcId="{6BE05E82-0788-434F-8F1F-766CCBB53E26}" destId="{BDBA44C2-FAC8-4B97-8397-316AEF75DF95}" srcOrd="0" destOrd="0" presId="urn:microsoft.com/office/officeart/2005/8/layout/cycle1"/>
+    <dgm:cxn modelId="{B1334330-C25C-4CF3-A6A6-424738A9FF83}" type="presOf" srcId="{91AF92F1-664C-44A9-A9AF-60B4FDE9F772}" destId="{4CFAF20E-2CE9-410D-8C4F-99A003CC7A05}" srcOrd="0" destOrd="0" presId="urn:microsoft.com/office/officeart/2005/8/layout/cycle1"/>
+    <dgm:cxn modelId="{74320E36-F702-4786-B766-631E0F214044}" type="presOf" srcId="{479B4475-028B-49AA-B2F9-90BDBEE58BE0}" destId="{08A8699B-3356-4B7B-86C7-BB255DDA25C7}" srcOrd="0" destOrd="0" presId="urn:microsoft.com/office/officeart/2005/8/layout/cycle1"/>
+    <dgm:cxn modelId="{B0A2A037-E134-479E-9CD9-D9A7841A09AA}" type="presOf" srcId="{CBBF1D43-21BB-410C-AC6C-70C1D793650C}" destId="{D0D498C8-D633-4DAB-A232-DDE8FFFB5F15}" srcOrd="0" destOrd="0" presId="urn:microsoft.com/office/officeart/2005/8/layout/cycle1"/>
+    <dgm:cxn modelId="{5A89F13C-9BCA-4CD1-85EA-B724B4EB9A5B}" srcId="{05E15462-8F3D-4C51-9038-72DEFD295ECB}" destId="{DDF5495A-ED8F-4CBF-90AA-52E91B0F974D}" srcOrd="6" destOrd="0" parTransId="{A2C3A9C1-39B3-4E11-A150-A9597BD5F3A5}" sibTransId="{2643CB98-36A8-4012-B2DC-54D795A23F8E}"/>
+    <dgm:cxn modelId="{374C495C-83C5-49A4-B278-9D6EEC42597B}" type="presOf" srcId="{A7C14BFC-42FD-484E-A7DC-C81B0C13922D}" destId="{3B3F15E8-7D55-4FC5-BDE6-E09F64430BA7}" srcOrd="0" destOrd="0" presId="urn:microsoft.com/office/officeart/2005/8/layout/cycle1"/>
+    <dgm:cxn modelId="{B6CFFF5C-1847-43B3-A3A4-689062C97691}" srcId="{05E15462-8F3D-4C51-9038-72DEFD295ECB}" destId="{A7C14BFC-42FD-484E-A7DC-C81B0C13922D}" srcOrd="0" destOrd="0" parTransId="{484E0BE8-1F82-4C49-81A1-CA7D3184A632}" sibTransId="{3E45865D-2544-4A4A-824E-AB2F19DC12D1}"/>
+    <dgm:cxn modelId="{3FADF241-E85F-479F-9D2B-DDF757CB2D3D}" type="presOf" srcId="{1A7A6048-8D1E-4CCB-AB57-A75B91002020}" destId="{DC19223B-BA97-489C-9FA1-B5820447A0A9}" srcOrd="0" destOrd="0" presId="urn:microsoft.com/office/officeart/2005/8/layout/cycle1"/>
+    <dgm:cxn modelId="{78994D67-6C56-42AA-9A92-74B9562778D0}" type="presOf" srcId="{3E45865D-2544-4A4A-824E-AB2F19DC12D1}" destId="{6E13AB0A-5338-43D8-B58F-44F7F16C54D7}" srcOrd="0" destOrd="0" presId="urn:microsoft.com/office/officeart/2005/8/layout/cycle1"/>
     <dgm:cxn modelId="{188F5469-7F54-45AE-8DCF-81C2C30149EF}" srcId="{05E15462-8F3D-4C51-9038-72DEFD295ECB}" destId="{1A7A6048-8D1E-4CCB-AB57-A75B91002020}" srcOrd="4" destOrd="0" parTransId="{3C61DCC7-D067-4AF7-B323-CA19CC6FC2D1}" sibTransId="{479B4475-028B-49AA-B2F9-90BDBEE58BE0}"/>
-    <dgm:cxn modelId="{B1334330-C25C-4CF3-A6A6-424738A9FF83}" type="presOf" srcId="{91AF92F1-664C-44A9-A9AF-60B4FDE9F772}" destId="{4CFAF20E-2CE9-410D-8C4F-99A003CC7A05}" srcOrd="0" destOrd="0" presId="urn:microsoft.com/office/officeart/2005/8/layout/cycle1"/>
+    <dgm:cxn modelId="{FD37194A-24B4-41AB-A8E5-5BBEE7002A7C}" type="presOf" srcId="{5A04C44D-C0E1-4B13-8EC9-A0528D875B47}" destId="{2959AFB0-C8CA-4E0A-A53F-203C7FFFBF0A}" srcOrd="0" destOrd="0" presId="urn:microsoft.com/office/officeart/2005/8/layout/cycle1"/>
+    <dgm:cxn modelId="{A733A46A-4896-4752-9173-DAC184FAF02B}" type="presOf" srcId="{034CDE8E-B2A9-4E1E-B64A-904B09C20502}" destId="{420BD5EA-43B2-44FA-8803-BCC6A1A5A971}" srcOrd="0" destOrd="0" presId="urn:microsoft.com/office/officeart/2005/8/layout/cycle1"/>
     <dgm:cxn modelId="{3839C451-7E83-4F7B-9F86-51C82D303344}" type="presOf" srcId="{2876A3AF-B4F2-4DB1-8BAA-28B5221EB7CB}" destId="{FEF4C21C-9519-4E2B-BDEC-2672152CB9DB}" srcOrd="0" destOrd="0" presId="urn:microsoft.com/office/officeart/2005/8/layout/cycle1"/>
-    <dgm:cxn modelId="{C0A0F42D-308F-4B81-8F79-03A4FF870FBE}" type="presOf" srcId="{6BE05E82-0788-434F-8F1F-766CCBB53E26}" destId="{BDBA44C2-FAC8-4B97-8397-316AEF75DF95}" srcOrd="0" destOrd="0" presId="urn:microsoft.com/office/officeart/2005/8/layout/cycle1"/>
-    <dgm:cxn modelId="{D70C1D1C-0F1F-4E43-B064-500B47324612}" srcId="{05E15462-8F3D-4C51-9038-72DEFD295ECB}" destId="{5A04C44D-C0E1-4B13-8EC9-A0528D875B47}" srcOrd="5" destOrd="0" parTransId="{735D546D-7B51-4C90-B5B8-F431DF17EC4C}" sibTransId="{B353A3A0-4BB2-47F8-8660-F5F68DEBB45B}"/>
+    <dgm:cxn modelId="{A5406953-5106-41EF-9E33-1E3B02EF1D24}" srcId="{05E15462-8F3D-4C51-9038-72DEFD295ECB}" destId="{034CDE8E-B2A9-4E1E-B64A-904B09C20502}" srcOrd="1" destOrd="0" parTransId="{FD32B512-4431-4188-B4A6-1348AB03D760}" sibTransId="{898D1AD8-C62B-4760-BBB3-CFFA028EEDA8}"/>
+    <dgm:cxn modelId="{2DC2AB74-D75D-4802-98C9-690EF6EE66F8}" type="presOf" srcId="{D45A3878-E47B-4C2C-B18F-233FC4AF1D5A}" destId="{9D700E5C-BD52-44F7-8383-C15FE2812038}" srcOrd="0" destOrd="0" presId="urn:microsoft.com/office/officeart/2005/8/layout/cycle1"/>
+    <dgm:cxn modelId="{8E0B1759-B891-4C54-B572-0D751DB9C1B8}" type="presOf" srcId="{2643CB98-36A8-4012-B2DC-54D795A23F8E}" destId="{0D57837E-456A-47B7-93E4-3ADD42796347}" srcOrd="0" destOrd="0" presId="urn:microsoft.com/office/officeart/2005/8/layout/cycle1"/>
+    <dgm:cxn modelId="{215C5279-BEE9-4936-9FAA-B984C3BE419E}" type="presOf" srcId="{A6444D54-FA08-4C85-877A-BC5406CF4EBD}" destId="{D5A464D3-EE9A-402A-B509-F4AF5037A84F}" srcOrd="0" destOrd="0" presId="urn:microsoft.com/office/officeart/2005/8/layout/cycle1"/>
+    <dgm:cxn modelId="{A2BB935A-1673-4E24-9772-4C44973FA503}" srcId="{05E15462-8F3D-4C51-9038-72DEFD295ECB}" destId="{2876A3AF-B4F2-4DB1-8BAA-28B5221EB7CB}" srcOrd="8" destOrd="0" parTransId="{A54849D3-978E-4AEF-BE10-1000943F0C62}" sibTransId="{A2344B46-04F2-4FB8-876F-797A525BBF96}"/>
     <dgm:cxn modelId="{0CE4E77E-D2ED-4B9E-9887-45E6045A1D33}" type="presOf" srcId="{05E15462-8F3D-4C51-9038-72DEFD295ECB}" destId="{5724728F-2991-471C-8F3E-8655C7CF9A7F}" srcOrd="0" destOrd="0" presId="urn:microsoft.com/office/officeart/2005/8/layout/cycle1"/>
-    <dgm:cxn modelId="{74320E36-F702-4786-B766-631E0F214044}" type="presOf" srcId="{479B4475-028B-49AA-B2F9-90BDBEE58BE0}" destId="{08A8699B-3356-4B7B-86C7-BB255DDA25C7}" srcOrd="0" destOrd="0" presId="urn:microsoft.com/office/officeart/2005/8/layout/cycle1"/>
-    <dgm:cxn modelId="{5A89F13C-9BCA-4CD1-85EA-B724B4EB9A5B}" srcId="{05E15462-8F3D-4C51-9038-72DEFD295ECB}" destId="{DDF5495A-ED8F-4CBF-90AA-52E91B0F974D}" srcOrd="6" destOrd="0" parTransId="{A2C3A9C1-39B3-4E11-A150-A9597BD5F3A5}" sibTransId="{2643CB98-36A8-4012-B2DC-54D795A23F8E}"/>
-    <dgm:cxn modelId="{2DC2AB74-D75D-4802-98C9-690EF6EE66F8}" type="presOf" srcId="{D45A3878-E47B-4C2C-B18F-233FC4AF1D5A}" destId="{9D700E5C-BD52-44F7-8383-C15FE2812038}" srcOrd="0" destOrd="0" presId="urn:microsoft.com/office/officeart/2005/8/layout/cycle1"/>
-    <dgm:cxn modelId="{B6CFFF5C-1847-43B3-A3A4-689062C97691}" srcId="{05E15462-8F3D-4C51-9038-72DEFD295ECB}" destId="{A7C14BFC-42FD-484E-A7DC-C81B0C13922D}" srcOrd="0" destOrd="0" parTransId="{484E0BE8-1F82-4C49-81A1-CA7D3184A632}" sibTransId="{3E45865D-2544-4A4A-824E-AB2F19DC12D1}"/>
-    <dgm:cxn modelId="{FD37194A-24B4-41AB-A8E5-5BBEE7002A7C}" type="presOf" srcId="{5A04C44D-C0E1-4B13-8EC9-A0528D875B47}" destId="{2959AFB0-C8CA-4E0A-A53F-203C7FFFBF0A}" srcOrd="0" destOrd="0" presId="urn:microsoft.com/office/officeart/2005/8/layout/cycle1"/>
-    <dgm:cxn modelId="{215C5279-BEE9-4936-9FAA-B984C3BE419E}" type="presOf" srcId="{A6444D54-FA08-4C85-877A-BC5406CF4EBD}" destId="{D5A464D3-EE9A-402A-B509-F4AF5037A84F}" srcOrd="0" destOrd="0" presId="urn:microsoft.com/office/officeart/2005/8/layout/cycle1"/>
-    <dgm:cxn modelId="{57E73DAD-0F8D-4CD5-B8E0-F245037A796D}" type="presOf" srcId="{39EECDCD-7E5A-49DB-BF25-D0428A85E907}" destId="{967C72B1-2C49-4884-AC8E-83A3A1C4B2E6}" srcOrd="0" destOrd="0" presId="urn:microsoft.com/office/officeart/2005/8/layout/cycle1"/>
-    <dgm:cxn modelId="{A5406953-5106-41EF-9E33-1E3B02EF1D24}" srcId="{05E15462-8F3D-4C51-9038-72DEFD295ECB}" destId="{034CDE8E-B2A9-4E1E-B64A-904B09C20502}" srcOrd="1" destOrd="0" parTransId="{FD32B512-4431-4188-B4A6-1348AB03D760}" sibTransId="{898D1AD8-C62B-4760-BBB3-CFFA028EEDA8}"/>
-    <dgm:cxn modelId="{3FADF241-E85F-479F-9D2B-DDF757CB2D3D}" type="presOf" srcId="{1A7A6048-8D1E-4CCB-AB57-A75B91002020}" destId="{DC19223B-BA97-489C-9FA1-B5820447A0A9}" srcOrd="0" destOrd="0" presId="urn:microsoft.com/office/officeart/2005/8/layout/cycle1"/>
-    <dgm:cxn modelId="{B0A2A037-E134-479E-9CD9-D9A7841A09AA}" type="presOf" srcId="{CBBF1D43-21BB-410C-AC6C-70C1D793650C}" destId="{D0D498C8-D633-4DAB-A232-DDE8FFFB5F15}" srcOrd="0" destOrd="0" presId="urn:microsoft.com/office/officeart/2005/8/layout/cycle1"/>
-    <dgm:cxn modelId="{A733A46A-4896-4752-9173-DAC184FAF02B}" type="presOf" srcId="{034CDE8E-B2A9-4E1E-B64A-904B09C20502}" destId="{420BD5EA-43B2-44FA-8803-BCC6A1A5A971}" srcOrd="0" destOrd="0" presId="urn:microsoft.com/office/officeart/2005/8/layout/cycle1"/>
-    <dgm:cxn modelId="{F247B1B7-04EB-4A35-A411-4EEADA22E529}" type="presOf" srcId="{187513CB-0041-48B1-8C3C-3793F176A38C}" destId="{9777A358-330E-42F4-A39C-90DE533A7C5A}" srcOrd="0" destOrd="0" presId="urn:microsoft.com/office/officeart/2005/8/layout/cycle1"/>
-    <dgm:cxn modelId="{A2BB935A-1673-4E24-9772-4C44973FA503}" srcId="{05E15462-8F3D-4C51-9038-72DEFD295ECB}" destId="{2876A3AF-B4F2-4DB1-8BAA-28B5221EB7CB}" srcOrd="8" destOrd="0" parTransId="{A54849D3-978E-4AEF-BE10-1000943F0C62}" sibTransId="{A2344B46-04F2-4FB8-876F-797A525BBF96}"/>
-    <dgm:cxn modelId="{78994D67-6C56-42AA-9A92-74B9562778D0}" type="presOf" srcId="{3E45865D-2544-4A4A-824E-AB2F19DC12D1}" destId="{6E13AB0A-5338-43D8-B58F-44F7F16C54D7}" srcOrd="0" destOrd="0" presId="urn:microsoft.com/office/officeart/2005/8/layout/cycle1"/>
-    <dgm:cxn modelId="{374C495C-83C5-49A4-B278-9D6EEC42597B}" type="presOf" srcId="{A7C14BFC-42FD-484E-A7DC-C81B0C13922D}" destId="{3B3F15E8-7D55-4FC5-BDE6-E09F64430BA7}" srcOrd="0" destOrd="0" presId="urn:microsoft.com/office/officeart/2005/8/layout/cycle1"/>
-    <dgm:cxn modelId="{8E0B1759-B891-4C54-B572-0D751DB9C1B8}" type="presOf" srcId="{2643CB98-36A8-4012-B2DC-54D795A23F8E}" destId="{0D57837E-456A-47B7-93E4-3ADD42796347}" srcOrd="0" destOrd="0" presId="urn:microsoft.com/office/officeart/2005/8/layout/cycle1"/>
-    <dgm:cxn modelId="{52915F01-4A3E-45AE-8B8A-7CF962986823}" type="presOf" srcId="{DDF5495A-ED8F-4CBF-90AA-52E91B0F974D}" destId="{30E18A30-8612-448E-9FCD-A4E8B810D55A}" srcOrd="0" destOrd="0" presId="urn:microsoft.com/office/officeart/2005/8/layout/cycle1"/>
-    <dgm:cxn modelId="{BF7A8D97-B1E5-4353-B6B3-E3190750EA2D}" srcId="{05E15462-8F3D-4C51-9038-72DEFD295ECB}" destId="{6BE05E82-0788-434F-8F1F-766CCBB53E26}" srcOrd="7" destOrd="0" parTransId="{54298CCB-BB42-4CAF-810E-91D928F773ED}" sibTransId="{CBBF1D43-21BB-410C-AC6C-70C1D793650C}"/>
-    <dgm:cxn modelId="{B84210D0-4EBE-49B8-B9AC-88A965777B26}" srcId="{05E15462-8F3D-4C51-9038-72DEFD295ECB}" destId="{187513CB-0041-48B1-8C3C-3793F176A38C}" srcOrd="2" destOrd="0" parTransId="{8949FE4E-3294-4BCB-911F-B885278D68F4}" sibTransId="{91AF92F1-664C-44A9-A9AF-60B4FDE9F772}"/>
     <dgm:cxn modelId="{CB50CC8D-C7D1-4E38-831E-CDEF86C13E8C}" type="presOf" srcId="{8EAD4F29-F68F-440D-BADC-DC6F8819E824}" destId="{AC31F8FC-833D-4CF5-AD19-1119055ECA89}" srcOrd="0" destOrd="0" presId="urn:microsoft.com/office/officeart/2005/8/layout/cycle1"/>
     <dgm:cxn modelId="{FB5EAD8E-F514-4B25-9D97-25E3EC28957C}" srcId="{05E15462-8F3D-4C51-9038-72DEFD295ECB}" destId="{A6444D54-FA08-4C85-877A-BC5406CF4EBD}" srcOrd="9" destOrd="0" parTransId="{C3CA1007-15D4-4A5A-8EF1-02556BC02816}" sibTransId="{39EECDCD-7E5A-49DB-BF25-D0428A85E907}"/>
+    <dgm:cxn modelId="{BF7A8D97-B1E5-4353-B6B3-E3190750EA2D}" srcId="{05E15462-8F3D-4C51-9038-72DEFD295ECB}" destId="{6BE05E82-0788-434F-8F1F-766CCBB53E26}" srcOrd="7" destOrd="0" parTransId="{54298CCB-BB42-4CAF-810E-91D928F773ED}" sibTransId="{CBBF1D43-21BB-410C-AC6C-70C1D793650C}"/>
+    <dgm:cxn modelId="{57E73DAD-0F8D-4CD5-B8E0-F245037A796D}" type="presOf" srcId="{39EECDCD-7E5A-49DB-BF25-D0428A85E907}" destId="{967C72B1-2C49-4884-AC8E-83A3A1C4B2E6}" srcOrd="0" destOrd="0" presId="urn:microsoft.com/office/officeart/2005/8/layout/cycle1"/>
     <dgm:cxn modelId="{DEF2CEB0-C617-492D-A263-09E9D26491AC}" type="presOf" srcId="{A2344B46-04F2-4FB8-876F-797A525BBF96}" destId="{B33A4974-B8FC-4117-BB7D-FCAC4975A154}" srcOrd="0" destOrd="0" presId="urn:microsoft.com/office/officeart/2005/8/layout/cycle1"/>
+    <dgm:cxn modelId="{F247B1B7-04EB-4A35-A411-4EEADA22E529}" type="presOf" srcId="{187513CB-0041-48B1-8C3C-3793F176A38C}" destId="{9777A358-330E-42F4-A39C-90DE533A7C5A}" srcOrd="0" destOrd="0" presId="urn:microsoft.com/office/officeart/2005/8/layout/cycle1"/>
+    <dgm:cxn modelId="{B84210D0-4EBE-49B8-B9AC-88A965777B26}" srcId="{05E15462-8F3D-4C51-9038-72DEFD295ECB}" destId="{187513CB-0041-48B1-8C3C-3793F176A38C}" srcOrd="2" destOrd="0" parTransId="{8949FE4E-3294-4BCB-911F-B885278D68F4}" sibTransId="{91AF92F1-664C-44A9-A9AF-60B4FDE9F772}"/>
+    <dgm:cxn modelId="{29E4F4D9-BDB9-46A2-8216-4521AB777B9D}" type="presOf" srcId="{B353A3A0-4BB2-47F8-8660-F5F68DEBB45B}" destId="{DC6AC8A5-37C0-4DE2-B2BE-410A5BFD8F16}" srcOrd="0" destOrd="0" presId="urn:microsoft.com/office/officeart/2005/8/layout/cycle1"/>
+    <dgm:cxn modelId="{5115A6E9-2FFF-47C6-AB56-15619D9E2535}" type="presOf" srcId="{898D1AD8-C62B-4760-BBB3-CFFA028EEDA8}" destId="{C5A28ECE-5F95-4A81-8113-75DC5544F906}" srcOrd="0" destOrd="0" presId="urn:microsoft.com/office/officeart/2005/8/layout/cycle1"/>
     <dgm:cxn modelId="{51B3C9F0-8E8E-4FE5-9511-181A3FB4A370}" srcId="{05E15462-8F3D-4C51-9038-72DEFD295ECB}" destId="{D45A3878-E47B-4C2C-B18F-233FC4AF1D5A}" srcOrd="3" destOrd="0" parTransId="{07C9023C-5154-403C-AB0D-AA5FE36D9AC7}" sibTransId="{8EAD4F29-F68F-440D-BADC-DC6F8819E824}"/>
-    <dgm:cxn modelId="{5115A6E9-2FFF-47C6-AB56-15619D9E2535}" type="presOf" srcId="{898D1AD8-C62B-4760-BBB3-CFFA028EEDA8}" destId="{C5A28ECE-5F95-4A81-8113-75DC5544F906}" srcOrd="0" destOrd="0" presId="urn:microsoft.com/office/officeart/2005/8/layout/cycle1"/>
-    <dgm:cxn modelId="{29E4F4D9-BDB9-46A2-8216-4521AB777B9D}" type="presOf" srcId="{B353A3A0-4BB2-47F8-8660-F5F68DEBB45B}" destId="{DC6AC8A5-37C0-4DE2-B2BE-410A5BFD8F16}" srcOrd="0" destOrd="0" presId="urn:microsoft.com/office/officeart/2005/8/layout/cycle1"/>
     <dgm:cxn modelId="{ACDF6AC7-CEC5-4AF3-A75A-6A31F2A785EF}" type="presParOf" srcId="{5724728F-2991-471C-8F3E-8655C7CF9A7F}" destId="{7553334A-46BC-496D-AD66-04BC3B4CFE45}" srcOrd="0" destOrd="0" presId="urn:microsoft.com/office/officeart/2005/8/layout/cycle1"/>
     <dgm:cxn modelId="{EA6E3C76-E4EE-40E5-86FA-548EA61427D0}" type="presParOf" srcId="{5724728F-2991-471C-8F3E-8655C7CF9A7F}" destId="{3B3F15E8-7D55-4FC5-BDE6-E09F64430BA7}" srcOrd="1" destOrd="0" presId="urn:microsoft.com/office/officeart/2005/8/layout/cycle1"/>
     <dgm:cxn modelId="{42A3FE92-F76A-4503-9DE0-6028E5F680CC}" type="presParOf" srcId="{5724728F-2991-471C-8F3E-8655C7CF9A7F}" destId="{6E13AB0A-5338-43D8-B58F-44F7F16C54D7}" srcOrd="2" destOrd="0" presId="urn:microsoft.com/office/officeart/2005/8/layout/cycle1"/>
@@ -1839,7 +1920,7 @@
         </a:bodyPr>
         <a:lstStyle/>
         <a:p>
-          <a:pPr lvl="0" algn="ctr" defTabSz="355600">
+          <a:pPr marL="0" lvl="0" indent="0" algn="ctr" defTabSz="355600">
             <a:lnSpc>
               <a:spcPct val="90000"/>
             </a:lnSpc>
@@ -1849,6 +1930,7 @@
             <a:spcAft>
               <a:spcPct val="35000"/>
             </a:spcAft>
+            <a:buNone/>
           </a:pPr>
           <a:r>
             <a:rPr lang="es-ES" sz="800" b="1" kern="1200" dirty="0">
@@ -1962,7 +2044,7 @@
         </a:bodyPr>
         <a:lstStyle/>
         <a:p>
-          <a:pPr lvl="0" algn="ctr" defTabSz="355600">
+          <a:pPr marL="0" lvl="0" indent="0" algn="ctr" defTabSz="355600">
             <a:lnSpc>
               <a:spcPct val="90000"/>
             </a:lnSpc>
@@ -1972,6 +2054,7 @@
             <a:spcAft>
               <a:spcPct val="35000"/>
             </a:spcAft>
+            <a:buNone/>
           </a:pPr>
           <a:r>
             <a:rPr lang="es-ES" sz="800" b="1" kern="1200" dirty="0">
@@ -2107,7 +2190,7 @@
         </a:bodyPr>
         <a:lstStyle/>
         <a:p>
-          <a:pPr lvl="0" algn="ctr" defTabSz="355600">
+          <a:pPr marL="0" lvl="0" indent="0" algn="ctr" defTabSz="355600">
             <a:lnSpc>
               <a:spcPct val="90000"/>
             </a:lnSpc>
@@ -2117,6 +2200,7 @@
             <a:spcAft>
               <a:spcPct val="35000"/>
             </a:spcAft>
+            <a:buNone/>
           </a:pPr>
           <a:r>
             <a:rPr lang="es-ES" sz="800" b="1" kern="1200" dirty="0">
@@ -2230,7 +2314,7 @@
         </a:bodyPr>
         <a:lstStyle/>
         <a:p>
-          <a:pPr lvl="0" algn="ctr" defTabSz="355600">
+          <a:pPr marL="0" lvl="0" indent="0" algn="ctr" defTabSz="355600">
             <a:lnSpc>
               <a:spcPct val="90000"/>
             </a:lnSpc>
@@ -2240,6 +2324,7 @@
             <a:spcAft>
               <a:spcPct val="35000"/>
             </a:spcAft>
+            <a:buNone/>
           </a:pPr>
           <a:r>
             <a:rPr lang="es-ES" sz="800" b="1" kern="1200" dirty="0">
@@ -2355,7 +2440,7 @@
         </a:bodyPr>
         <a:lstStyle/>
         <a:p>
-          <a:pPr lvl="0" algn="ctr" defTabSz="355600">
+          <a:pPr marL="0" lvl="0" indent="0" algn="ctr" defTabSz="355600">
             <a:lnSpc>
               <a:spcPct val="90000"/>
             </a:lnSpc>
@@ -2365,6 +2450,7 @@
             <a:spcAft>
               <a:spcPct val="35000"/>
             </a:spcAft>
+            <a:buNone/>
           </a:pPr>
           <a:r>
             <a:rPr lang="es-ES" sz="800" b="1" kern="1200" dirty="0">
@@ -2478,7 +2564,7 @@
         </a:bodyPr>
         <a:lstStyle/>
         <a:p>
-          <a:pPr lvl="0" algn="ctr" defTabSz="355600">
+          <a:pPr marL="0" lvl="0" indent="0" algn="ctr" defTabSz="355600">
             <a:lnSpc>
               <a:spcPct val="90000"/>
             </a:lnSpc>
@@ -2488,6 +2574,7 @@
             <a:spcAft>
               <a:spcPct val="35000"/>
             </a:spcAft>
+            <a:buNone/>
           </a:pPr>
           <a:r>
             <a:rPr lang="es-ES" sz="800" b="1" kern="1200" dirty="0">
@@ -2603,7 +2690,7 @@
         </a:bodyPr>
         <a:lstStyle/>
         <a:p>
-          <a:pPr lvl="0" algn="ctr" defTabSz="355600">
+          <a:pPr marL="0" lvl="0" indent="0" algn="ctr" defTabSz="355600">
             <a:lnSpc>
               <a:spcPct val="90000"/>
             </a:lnSpc>
@@ -2613,6 +2700,7 @@
             <a:spcAft>
               <a:spcPct val="35000"/>
             </a:spcAft>
+            <a:buNone/>
           </a:pPr>
           <a:r>
             <a:rPr lang="es-ES" sz="800" b="1" kern="1200" dirty="0">
@@ -2726,7 +2814,7 @@
         </a:bodyPr>
         <a:lstStyle/>
         <a:p>
-          <a:pPr lvl="0" algn="ctr" defTabSz="355600">
+          <a:pPr marL="0" lvl="0" indent="0" algn="ctr" defTabSz="355600">
             <a:lnSpc>
               <a:spcPct val="90000"/>
             </a:lnSpc>
@@ -2736,6 +2824,7 @@
             <a:spcAft>
               <a:spcPct val="35000"/>
             </a:spcAft>
+            <a:buNone/>
           </a:pPr>
           <a:r>
             <a:rPr lang="es-ES" sz="800" b="1" kern="1200" dirty="0">
@@ -2851,7 +2940,7 @@
         </a:bodyPr>
         <a:lstStyle/>
         <a:p>
-          <a:pPr lvl="0" algn="ctr" defTabSz="355600">
+          <a:pPr marL="0" lvl="0" indent="0" algn="ctr" defTabSz="355600">
             <a:lnSpc>
               <a:spcPct val="90000"/>
             </a:lnSpc>
@@ -2861,6 +2950,7 @@
             <a:spcAft>
               <a:spcPct val="35000"/>
             </a:spcAft>
+            <a:buNone/>
           </a:pPr>
           <a:r>
             <a:rPr lang="es-ES" sz="800" b="1" kern="1200" dirty="0">
@@ -2974,7 +3064,7 @@
         </a:bodyPr>
         <a:lstStyle/>
         <a:p>
-          <a:pPr lvl="0" algn="ctr" defTabSz="355600">
+          <a:pPr marL="0" lvl="0" indent="0" algn="ctr" defTabSz="355600">
             <a:lnSpc>
               <a:spcPct val="90000"/>
             </a:lnSpc>
@@ -2984,6 +3074,7 @@
             <a:spcAft>
               <a:spcPct val="35000"/>
             </a:spcAft>
+            <a:buNone/>
           </a:pPr>
           <a:r>
             <a:rPr lang="es-ES" sz="800" b="1" kern="1200" dirty="0">
@@ -4447,7 +4538,7 @@
           <a:p>
             <a:fld id="{F7C2FF9A-23E1-4EAD-A118-A77F41DDE3B1}" type="datetimeFigureOut">
               <a:rPr lang="es-CO" smtClean="0"/>
-              <a:t>24/02/2026</a:t>
+              <a:t>26/10/2026</a:t>
             </a:fld>
             <a:endParaRPr lang="es-CO"/>
           </a:p>
@@ -4647,7 +4738,7 @@
           <a:p>
             <a:fld id="{F7C2FF9A-23E1-4EAD-A118-A77F41DDE3B1}" type="datetimeFigureOut">
               <a:rPr lang="es-CO" smtClean="0"/>
-              <a:t>24/02/2026</a:t>
+              <a:t>26/10/2026</a:t>
             </a:fld>
             <a:endParaRPr lang="es-CO"/>
           </a:p>
@@ -4857,7 +4948,7 @@
           <a:p>
             <a:fld id="{F7C2FF9A-23E1-4EAD-A118-A77F41DDE3B1}" type="datetimeFigureOut">
               <a:rPr lang="es-CO" smtClean="0"/>
-              <a:t>24/02/2026</a:t>
+              <a:t>26/10/2026</a:t>
             </a:fld>
             <a:endParaRPr lang="es-CO"/>
           </a:p>
@@ -5057,7 +5148,7 @@
           <a:p>
             <a:fld id="{F7C2FF9A-23E1-4EAD-A118-A77F41DDE3B1}" type="datetimeFigureOut">
               <a:rPr lang="es-CO" smtClean="0"/>
-              <a:t>24/02/2026</a:t>
+              <a:t>26/10/2026</a:t>
             </a:fld>
             <a:endParaRPr lang="es-CO"/>
           </a:p>
@@ -5333,7 +5424,7 @@
           <a:p>
             <a:fld id="{F7C2FF9A-23E1-4EAD-A118-A77F41DDE3B1}" type="datetimeFigureOut">
               <a:rPr lang="es-CO" smtClean="0"/>
-              <a:t>24/02/2026</a:t>
+              <a:t>26/10/2026</a:t>
             </a:fld>
             <a:endParaRPr lang="es-CO"/>
           </a:p>
@@ -5601,7 +5692,7 @@
           <a:p>
             <a:fld id="{F7C2FF9A-23E1-4EAD-A118-A77F41DDE3B1}" type="datetimeFigureOut">
               <a:rPr lang="es-CO" smtClean="0"/>
-              <a:t>24/02/2026</a:t>
+              <a:t>26/10/2026</a:t>
             </a:fld>
             <a:endParaRPr lang="es-CO"/>
           </a:p>
@@ -6016,7 +6107,7 @@
           <a:p>
             <a:fld id="{F7C2FF9A-23E1-4EAD-A118-A77F41DDE3B1}" type="datetimeFigureOut">
               <a:rPr lang="es-CO" smtClean="0"/>
-              <a:t>24/02/2026</a:t>
+              <a:t>26/10/2026</a:t>
             </a:fld>
             <a:endParaRPr lang="es-CO"/>
           </a:p>
@@ -6158,7 +6249,7 @@
           <a:p>
             <a:fld id="{F7C2FF9A-23E1-4EAD-A118-A77F41DDE3B1}" type="datetimeFigureOut">
               <a:rPr lang="es-CO" smtClean="0"/>
-              <a:t>24/02/2026</a:t>
+              <a:t>26/10/2026</a:t>
             </a:fld>
             <a:endParaRPr lang="es-CO"/>
           </a:p>
@@ -6271,7 +6362,7 @@
           <a:p>
             <a:fld id="{F7C2FF9A-23E1-4EAD-A118-A77F41DDE3B1}" type="datetimeFigureOut">
               <a:rPr lang="es-CO" smtClean="0"/>
-              <a:t>24/02/2026</a:t>
+              <a:t>26/10/2026</a:t>
             </a:fld>
             <a:endParaRPr lang="es-CO"/>
           </a:p>
@@ -6584,7 +6675,7 @@
           <a:p>
             <a:fld id="{F7C2FF9A-23E1-4EAD-A118-A77F41DDE3B1}" type="datetimeFigureOut">
               <a:rPr lang="es-CO" smtClean="0"/>
-              <a:t>24/02/2026</a:t>
+              <a:t>26/10/2026</a:t>
             </a:fld>
             <a:endParaRPr lang="es-CO"/>
           </a:p>
@@ -6873,7 +6964,7 @@
           <a:p>
             <a:fld id="{F7C2FF9A-23E1-4EAD-A118-A77F41DDE3B1}" type="datetimeFigureOut">
               <a:rPr lang="es-CO" smtClean="0"/>
-              <a:t>24/02/2026</a:t>
+              <a:t>26/10/2026</a:t>
             </a:fld>
             <a:endParaRPr lang="es-CO"/>
           </a:p>
@@ -7116,7 +7207,7 @@
           <a:p>
             <a:fld id="{F7C2FF9A-23E1-4EAD-A118-A77F41DDE3B1}" type="datetimeFigureOut">
               <a:rPr lang="es-CO" smtClean="0"/>
-              <a:t>24/02/2026</a:t>
+              <a:t>26/10/2026</a:t>
             </a:fld>
             <a:endParaRPr lang="es-CO"/>
           </a:p>
@@ -7871,250 +7962,694 @@
           </a:extLst>
         </p:spPr>
       </p:pic>
-      <p:sp>
-        <p:nvSpPr>
-          <p:cNvPr id="8" name="CuadroTexto 7">
-            <a:extLst>
-              <a:ext uri="{FF2B5EF4-FFF2-40B4-BE49-F238E27FC236}">
-                <a16:creationId xmlns:a16="http://schemas.microsoft.com/office/drawing/2014/main" id="{7A3F4DB9-7D60-9ABC-1299-A85413CA55EB}"/>
-              </a:ext>
-            </a:extLst>
-          </p:cNvPr>
-          <p:cNvSpPr txBox="1"/>
-          <p:nvPr/>
-        </p:nvSpPr>
-        <p:spPr>
-          <a:xfrm>
-            <a:off x="1000387" y="1759828"/>
-            <a:ext cx="6094602" cy="3057312"/>
-          </a:xfrm>
-          <a:prstGeom prst="rect">
-            <a:avLst/>
-          </a:prstGeom>
-          <a:noFill/>
-        </p:spPr>
-        <p:txBody>
-          <a:bodyPr wrap="square">
-            <a:spAutoFit/>
-          </a:bodyPr>
-          <a:lstStyle/>
-          <a:p>
-            <a:pPr algn="just">
-              <a:lnSpc>
-                <a:spcPct val="107000"/>
-              </a:lnSpc>
-              <a:spcAft>
-                <a:spcPts val="800"/>
-              </a:spcAft>
-            </a:pPr>
-            <a:r>
-              <a:rPr lang="es-ES" sz="1800" dirty="0">
-                <a:solidFill>
-                  <a:schemeClr val="bg1">
-                    <a:lumMod val="50000"/>
-                  </a:schemeClr>
-                </a:solidFill>
-                <a:latin typeface="Josefin Sans" panose="00000500000000000000" pitchFamily="2" charset="0"/>
-              </a:rPr>
-              <a:t>Presente las </a:t>
-            </a:r>
-            <a:r>
-              <a:rPr lang="es-ES" sz="1800" dirty="0">
-                <a:solidFill>
-                  <a:srgbClr val="00B050"/>
-                </a:solidFill>
-                <a:latin typeface="Josefin Sans" panose="00000500000000000000" pitchFamily="2" charset="0"/>
-              </a:rPr>
-              <a:t>cifras de tu modelo de negocio </a:t>
-            </a:r>
-            <a:r>
-              <a:rPr lang="es-ES" sz="1800" dirty="0">
-                <a:solidFill>
-                  <a:schemeClr val="bg1">
-                    <a:lumMod val="50000"/>
-                  </a:schemeClr>
-                </a:solidFill>
-                <a:latin typeface="Josefin Sans" panose="00000500000000000000" pitchFamily="2" charset="0"/>
-              </a:rPr>
-              <a:t>en los siguientes elementos:</a:t>
-            </a:r>
-          </a:p>
-          <a:p>
-            <a:pPr algn="just">
-              <a:lnSpc>
-                <a:spcPct val="107000"/>
-              </a:lnSpc>
-              <a:spcAft>
-                <a:spcPts val="800"/>
-              </a:spcAft>
-            </a:pPr>
-            <a:r>
-              <a:rPr lang="es-ES" sz="1800" dirty="0">
-                <a:solidFill>
-                  <a:schemeClr val="bg1">
-                    <a:lumMod val="50000"/>
-                  </a:schemeClr>
-                </a:solidFill>
-                <a:latin typeface="Josefin Sans" panose="00000500000000000000" pitchFamily="2" charset="0"/>
-              </a:rPr>
-              <a:t>¿Cuánto vale mi proyecto? </a:t>
-            </a:r>
-          </a:p>
-          <a:p>
-            <a:pPr algn="just">
-              <a:lnSpc>
-                <a:spcPct val="107000"/>
-              </a:lnSpc>
-              <a:spcAft>
-                <a:spcPts val="800"/>
-              </a:spcAft>
-            </a:pPr>
-            <a:r>
-              <a:rPr lang="es-ES" sz="1800" dirty="0">
-                <a:solidFill>
-                  <a:schemeClr val="bg1">
-                    <a:lumMod val="50000"/>
-                  </a:schemeClr>
-                </a:solidFill>
-                <a:latin typeface="Josefin Sans" panose="00000500000000000000" pitchFamily="2" charset="0"/>
-              </a:rPr>
-              <a:t>Presente detallado el valor del proyecto</a:t>
-            </a:r>
-          </a:p>
-          <a:p>
-            <a:pPr algn="just">
-              <a:lnSpc>
-                <a:spcPct val="107000"/>
-              </a:lnSpc>
-              <a:spcAft>
-                <a:spcPts val="800"/>
-              </a:spcAft>
-            </a:pPr>
-            <a:r>
-              <a:rPr lang="es-ES" sz="1800" dirty="0">
-                <a:solidFill>
-                  <a:schemeClr val="bg1">
-                    <a:lumMod val="50000"/>
-                  </a:schemeClr>
-                </a:solidFill>
-                <a:latin typeface="Josefin Sans" panose="00000500000000000000" pitchFamily="2" charset="0"/>
-              </a:rPr>
-              <a:t>¿Cuánto es mi aporte como emprendedor?</a:t>
-            </a:r>
-          </a:p>
-          <a:p>
-            <a:pPr algn="just">
-              <a:lnSpc>
-                <a:spcPct val="107000"/>
-              </a:lnSpc>
-              <a:spcAft>
-                <a:spcPts val="800"/>
-              </a:spcAft>
-            </a:pPr>
-            <a:r>
-              <a:rPr lang="es-ES" sz="1800" dirty="0">
-                <a:solidFill>
-                  <a:schemeClr val="bg1">
-                    <a:lumMod val="50000"/>
-                  </a:schemeClr>
-                </a:solidFill>
-                <a:latin typeface="Josefin Sans" panose="00000500000000000000" pitchFamily="2" charset="0"/>
-              </a:rPr>
-              <a:t>¿En qué se van a utilizar los recursos a solicitar?</a:t>
-            </a:r>
-          </a:p>
-          <a:p>
-            <a:pPr algn="just">
-              <a:lnSpc>
-                <a:spcPct val="107000"/>
-              </a:lnSpc>
-              <a:spcAft>
-                <a:spcPts val="800"/>
-              </a:spcAft>
-            </a:pPr>
-            <a:r>
-              <a:rPr lang="es-ES" sz="1800" dirty="0">
-                <a:solidFill>
-                  <a:schemeClr val="bg1">
-                    <a:lumMod val="50000"/>
-                  </a:schemeClr>
-                </a:solidFill>
-                <a:latin typeface="Josefin Sans" panose="00000500000000000000" pitchFamily="2" charset="0"/>
-              </a:rPr>
-              <a:t>Proyección de Ventas a 5 años </a:t>
-            </a:r>
-          </a:p>
-          <a:p>
-            <a:pPr algn="just">
-              <a:lnSpc>
-                <a:spcPct val="107000"/>
-              </a:lnSpc>
-              <a:spcAft>
-                <a:spcPts val="800"/>
-              </a:spcAft>
-            </a:pPr>
-            <a:r>
-              <a:rPr lang="es-ES" sz="1800" dirty="0">
-                <a:solidFill>
-                  <a:schemeClr val="bg1">
-                    <a:lumMod val="50000"/>
-                  </a:schemeClr>
-                </a:solidFill>
-                <a:latin typeface="Josefin Sans" panose="00000500000000000000" pitchFamily="2" charset="0"/>
-              </a:rPr>
-              <a:t>(Tiempo sugerido: 2 minutos)</a:t>
-            </a:r>
-          </a:p>
-        </p:txBody>
-      </p:sp>
-      <p:pic>
-        <p:nvPicPr>
-          <p:cNvPr id="9" name="Picture 2" descr="Dinero, Moneda, Inversión, Negocio, Las Finanzas, Banco">
-            <a:extLst>
-              <a:ext uri="{FF2B5EF4-FFF2-40B4-BE49-F238E27FC236}">
-                <a16:creationId xmlns:a16="http://schemas.microsoft.com/office/drawing/2014/main" id="{6466F96B-EEE3-2CE5-46B0-CBB1E7C4641B}"/>
-              </a:ext>
-            </a:extLst>
-          </p:cNvPr>
-          <p:cNvPicPr>
-            <a:picLocks noChangeAspect="1" noChangeArrowheads="1"/>
-          </p:cNvPicPr>
-          <p:nvPr/>
-        </p:nvPicPr>
-        <p:blipFill>
-          <a:blip r:embed="rId3">
-            <a:alphaModFix amt="35000"/>
-            <a:extLst>
-              <a:ext uri="{28A0092B-C50C-407E-A947-70E740481C1C}">
-                <a14:useLocalDpi xmlns:a14="http://schemas.microsoft.com/office/drawing/2010/main" val="0"/>
-              </a:ext>
-            </a:extLst>
-          </a:blip>
-          <a:srcRect/>
-          <a:stretch>
-            <a:fillRect/>
-          </a:stretch>
-        </p:blipFill>
-        <p:spPr bwMode="auto">
-          <a:xfrm>
-            <a:off x="7204046" y="1911441"/>
-            <a:ext cx="4104997" cy="3035117"/>
-          </a:xfrm>
-          <a:prstGeom prst="rect">
-            <a:avLst/>
-          </a:prstGeom>
-          <a:noFill/>
-          <a:extLst>
-            <a:ext uri="{909E8E84-426E-40DD-AFC4-6F175D3DCCD1}">
-              <a14:hiddenFill xmlns:a14="http://schemas.microsoft.com/office/drawing/2010/main">
-                <a:solidFill>
-                  <a:srgbClr val="FFFFFF"/>
-                </a:solidFill>
-              </a14:hiddenFill>
-            </a:ext>
-          </a:extLst>
-        </p:spPr>
-      </p:pic>
+      <mc:AlternateContent xmlns:mc="http://schemas.openxmlformats.org/markup-compatibility/2006">
+        <mc:Choice xmlns:a14="http://schemas.microsoft.com/office/drawing/2010/main" Requires="a14">
+          <p:graphicFrame>
+            <p:nvGraphicFramePr>
+              <p:cNvPr id="2" name="Tabla 1">
+                <a:extLst>
+                  <a:ext uri="{FF2B5EF4-FFF2-40B4-BE49-F238E27FC236}">
+                    <a16:creationId xmlns:a16="http://schemas.microsoft.com/office/drawing/2014/main" id="{B6EBA026-DF03-BC5C-A813-9CD07CD201A5}"/>
+                  </a:ext>
+                </a:extLst>
+              </p:cNvPr>
+              <p:cNvGraphicFramePr>
+                <a:graphicFrameLocks noGrp="1"/>
+              </p:cNvGraphicFramePr>
+              <p:nvPr>
+                <p:extLst>
+                  <p:ext uri="{D42A27DB-BD31-4B8C-83A1-F6EECF244321}">
+                    <p14:modId xmlns:p14="http://schemas.microsoft.com/office/powerpoint/2010/main" val="1555067058"/>
+                  </p:ext>
+                </p:extLst>
+              </p:nvPr>
+            </p:nvGraphicFramePr>
+            <p:xfrm>
+              <a:off x="950168" y="1975618"/>
+              <a:ext cx="10515600" cy="3566160"/>
+            </p:xfrm>
+            <a:graphic>
+              <a:graphicData uri="http://schemas.openxmlformats.org/drawingml/2006/table">
+                <a:tbl>
+                  <a:tblPr>
+                    <a:tableStyleId>{5940675A-B579-460E-94D1-54222C63F5DA}</a:tableStyleId>
+                  </a:tblPr>
+                  <a:tblGrid>
+                    <a:gridCol w="5257800">
+                      <a:extLst>
+                        <a:ext uri="{9D8B030D-6E8A-4147-A177-3AD203B41FA5}">
+                          <a16:colId xmlns:a16="http://schemas.microsoft.com/office/drawing/2014/main" val="3883536860"/>
+                        </a:ext>
+                      </a:extLst>
+                    </a:gridCol>
+                    <a:gridCol w="5257800">
+                      <a:extLst>
+                        <a:ext uri="{9D8B030D-6E8A-4147-A177-3AD203B41FA5}">
+                          <a16:colId xmlns:a16="http://schemas.microsoft.com/office/drawing/2014/main" val="3627606060"/>
+                        </a:ext>
+                      </a:extLst>
+                    </a:gridCol>
+                  </a:tblGrid>
+                  <a:tr h="356252">
+                    <a:tc>
+                      <a:txBody>
+                        <a:bodyPr/>
+                        <a:lstStyle/>
+                        <a:p>
+                          <a:pPr algn="ctr">
+                            <a:buNone/>
+                          </a:pPr>
+                          <a:r>
+                            <a:rPr lang="es-CO" b="1">
+                              <a:effectLst/>
+                            </a:rPr>
+                            <a:t>Elemento Financiero</a:t>
+                          </a:r>
+                        </a:p>
+                      </a:txBody>
+                      <a:tcPr anchor="ctr">
+                        <a:solidFill>
+                          <a:schemeClr val="accent6">
+                            <a:lumMod val="20000"/>
+                            <a:lumOff val="80000"/>
+                          </a:schemeClr>
+                        </a:solidFill>
+                      </a:tcPr>
+                    </a:tc>
+                    <a:tc>
+                      <a:txBody>
+                        <a:bodyPr/>
+                        <a:lstStyle/>
+                        <a:p>
+                          <a:pPr algn="ctr">
+                            <a:buNone/>
+                          </a:pPr>
+                          <a:r>
+                            <a:rPr lang="es-CO" b="1" dirty="0">
+                              <a:effectLst/>
+                            </a:rPr>
+                            <a:t>Cifras y Detalle del Modelo</a:t>
+                          </a:r>
+                        </a:p>
+                      </a:txBody>
+                      <a:tcPr anchor="ctr">
+                        <a:solidFill>
+                          <a:schemeClr val="accent6">
+                            <a:lumMod val="20000"/>
+                            <a:lumOff val="80000"/>
+                          </a:schemeClr>
+                        </a:solidFill>
+                      </a:tcPr>
+                    </a:tc>
+                    <a:extLst>
+                      <a:ext uri="{0D108BD9-81ED-4DB2-BD59-A6C34878D82A}">
+                        <a16:rowId xmlns:a16="http://schemas.microsoft.com/office/drawing/2014/main" val="80401375"/>
+                      </a:ext>
+                    </a:extLst>
+                  </a:tr>
+                  <a:tr h="623442">
+                    <a:tc>
+                      <a:txBody>
+                        <a:bodyPr/>
+                        <a:lstStyle/>
+                        <a:p>
+                          <a:pPr algn="l">
+                            <a:buNone/>
+                          </a:pPr>
+                          <a:r>
+                            <a:rPr lang="es-CO">
+                              <a:effectLst/>
+                            </a:rPr>
+                            <a:t>Inversión y Financiación</a:t>
+                          </a:r>
+                        </a:p>
+                      </a:txBody>
+                      <a:tcPr anchor="ctr"/>
+                    </a:tc>
+                    <a:tc>
+                      <a:txBody>
+                        <a:bodyPr/>
+                        <a:lstStyle/>
+                        <a:p>
+                          <a:pPr algn="l">
+                            <a:buNone/>
+                          </a:pPr>
+                          <a:r>
+                            <a:rPr lang="es-CO" dirty="0">
+                              <a:effectLst/>
+                            </a:rPr>
+                            <a:t>$47.344.222 COP (Aporte propio: </a:t>
+                          </a:r>
+                          <a14:m>
+                            <m:oMath xmlns:m="http://schemas.openxmlformats.org/officeDocument/2006/math">
+                              <m:r>
+                                <a:rPr lang="es-CO"/>
+                                <m:t>6.7</m:t>
+                              </m:r>
+                              <m:r>
+                                <a:rPr lang="es-CO"/>
+                                <m:t>𝑀</m:t>
+                              </m:r>
+                              <m:r>
+                                <a:rPr lang="es-CO" b="0" i="0" smtClean="0">
+                                  <a:latin typeface="Cambria Math" panose="02040503050406030204" pitchFamily="18" charset="0"/>
+                                </a:rPr>
+                                <m:t>          </m:t>
+                              </m:r>
+                              <m:d>
+                                <m:dPr>
+                                  <m:begChr m:val="["/>
+                                  <m:endChr m:val=""/>
+                                  <m:ctrlPr>
+                                    <a:rPr lang="es-CO"/>
+                                  </m:ctrlPr>
+                                </m:dPr>
+                                <m:e>
+                                  <m:r>
+                                    <a:rPr lang="es-CO"/>
+                                    <m:t>14</m:t>
+                                  </m:r>
+                                </m:e>
+                              </m:d>
+                            </m:oMath>
+                          </a14:m>
+                          <a:r>
+                            <a:rPr lang="es-CO" dirty="0">
+                              <a:effectLst/>
+                            </a:rPr>
+                            <a:t>40.6M [86%])</a:t>
+                          </a:r>
+                        </a:p>
+                      </a:txBody>
+                      <a:tcPr anchor="ctr"/>
+                    </a:tc>
+                    <a:extLst>
+                      <a:ext uri="{0D108BD9-81ED-4DB2-BD59-A6C34878D82A}">
+                        <a16:rowId xmlns:a16="http://schemas.microsoft.com/office/drawing/2014/main" val="1833631116"/>
+                      </a:ext>
+                    </a:extLst>
+                  </a:tr>
+                  <a:tr h="623442">
+                    <a:tc>
+                      <a:txBody>
+                        <a:bodyPr/>
+                        <a:lstStyle/>
+                        <a:p>
+                          <a:pPr algn="l">
+                            <a:buNone/>
+                          </a:pPr>
+                          <a:r>
+                            <a:rPr lang="es-CO">
+                              <a:effectLst/>
+                            </a:rPr>
+                            <a:t>Destino de los Recursos</a:t>
+                          </a:r>
+                        </a:p>
+                      </a:txBody>
+                      <a:tcPr anchor="ctr"/>
+                    </a:tc>
+                    <a:tc>
+                      <a:txBody>
+                        <a:bodyPr/>
+                        <a:lstStyle/>
+                        <a:p>
+                          <a:pPr algn="l">
+                            <a:buNone/>
+                          </a:pPr>
+                          <a:r>
+                            <a:rPr lang="es-CO" dirty="0">
+                              <a:effectLst/>
+                            </a:rPr>
+                            <a:t>Cómputo: $9.85M • Muebles: $4.5M • Trámites legales/SIC: $2.8M • Capital de trabajo: $30.19M</a:t>
+                          </a:r>
+                        </a:p>
+                      </a:txBody>
+                      <a:tcPr anchor="ctr"/>
+                    </a:tc>
+                    <a:extLst>
+                      <a:ext uri="{0D108BD9-81ED-4DB2-BD59-A6C34878D82A}">
+                        <a16:rowId xmlns:a16="http://schemas.microsoft.com/office/drawing/2014/main" val="1801340951"/>
+                      </a:ext>
+                    </a:extLst>
+                  </a:tr>
+                  <a:tr h="623442">
+                    <a:tc>
+                      <a:txBody>
+                        <a:bodyPr/>
+                        <a:lstStyle/>
+                        <a:p>
+                          <a:pPr algn="l">
+                            <a:buNone/>
+                          </a:pPr>
+                          <a:r>
+                            <a:rPr lang="es-CO">
+                              <a:effectLst/>
+                            </a:rPr>
+                            <a:t>Ventas a 5 Años</a:t>
+                          </a:r>
+                        </a:p>
+                      </a:txBody>
+                      <a:tcPr anchor="ctr"/>
+                    </a:tc>
+                    <a:tc>
+                      <a:txBody>
+                        <a:bodyPr/>
+                        <a:lstStyle/>
+                        <a:p>
+                          <a:pPr algn="l">
+                            <a:buNone/>
+                          </a:pPr>
+                          <a:r>
+                            <a:rPr lang="es-CO">
+                              <a:effectLst/>
+                            </a:rPr>
+                            <a:t>Año 1: 12 lic. ($54M) ➔ Año 3: 38 lic. ($189M) ➔ Año 5: 68 lic. ($358M)</a:t>
+                          </a:r>
+                        </a:p>
+                      </a:txBody>
+                      <a:tcPr anchor="ctr"/>
+                    </a:tc>
+                    <a:extLst>
+                      <a:ext uri="{0D108BD9-81ED-4DB2-BD59-A6C34878D82A}">
+                        <a16:rowId xmlns:a16="http://schemas.microsoft.com/office/drawing/2014/main" val="3150748626"/>
+                      </a:ext>
+                    </a:extLst>
+                  </a:tr>
+                  <a:tr h="623442">
+                    <a:tc>
+                      <a:txBody>
+                        <a:bodyPr/>
+                        <a:lstStyle/>
+                        <a:p>
+                          <a:pPr algn="l">
+                            <a:buNone/>
+                          </a:pPr>
+                          <a:r>
+                            <a:rPr lang="es-CO">
+                              <a:effectLst/>
+                            </a:rPr>
+                            <a:t>Indicadores (TIO 15%)</a:t>
+                          </a:r>
+                        </a:p>
+                      </a:txBody>
+                      <a:tcPr anchor="ctr"/>
+                    </a:tc>
+                    <a:tc>
+                      <a:txBody>
+                        <a:bodyPr/>
+                        <a:lstStyle/>
+                        <a:p>
+                          <a:pPr algn="l">
+                            <a:buNone/>
+                          </a:pPr>
+                          <a:r>
+                            <a:rPr lang="es-CO">
+                              <a:effectLst/>
+                            </a:rPr>
+                            <a:t>VPN: +$125.340.830 COP | TIR: 62.88% | Recuperación (PRI): 2.4 años</a:t>
+                          </a:r>
+                        </a:p>
+                      </a:txBody>
+                      <a:tcPr anchor="ctr"/>
+                    </a:tc>
+                    <a:extLst>
+                      <a:ext uri="{0D108BD9-81ED-4DB2-BD59-A6C34878D82A}">
+                        <a16:rowId xmlns:a16="http://schemas.microsoft.com/office/drawing/2014/main" val="1683781722"/>
+                      </a:ext>
+                    </a:extLst>
+                  </a:tr>
+                  <a:tr h="623442">
+                    <a:tc>
+                      <a:txBody>
+                        <a:bodyPr/>
+                        <a:lstStyle/>
+                        <a:p>
+                          <a:pPr algn="l">
+                            <a:buNone/>
+                          </a:pPr>
+                          <a:r>
+                            <a:rPr lang="es-CO">
+                              <a:effectLst/>
+                            </a:rPr>
+                            <a:t>Punto de Equilibrio</a:t>
+                          </a:r>
+                        </a:p>
+                      </a:txBody>
+                      <a:tcPr anchor="ctr"/>
+                    </a:tc>
+                    <a:tc>
+                      <a:txBody>
+                        <a:bodyPr/>
+                        <a:lstStyle/>
+                        <a:p>
+                          <a:pPr algn="l">
+                            <a:buNone/>
+                          </a:pPr>
+                          <a:r>
+                            <a:rPr lang="es-CO" dirty="0">
+                              <a:effectLst/>
+                            </a:rPr>
+                            <a:t>32.2 licencias Plan Lean (Margen Bruto: 93.07% | Relación B/C: 1.30)</a:t>
+                          </a:r>
+                        </a:p>
+                      </a:txBody>
+                      <a:tcPr anchor="ctr"/>
+                    </a:tc>
+                    <a:extLst>
+                      <a:ext uri="{0D108BD9-81ED-4DB2-BD59-A6C34878D82A}">
+                        <a16:rowId xmlns:a16="http://schemas.microsoft.com/office/drawing/2014/main" val="4085677177"/>
+                      </a:ext>
+                    </a:extLst>
+                  </a:tr>
+                </a:tbl>
+              </a:graphicData>
+            </a:graphic>
+          </p:graphicFrame>
+        </mc:Choice>
+        <mc:Fallback>
+          <p:graphicFrame>
+            <p:nvGraphicFramePr>
+              <p:cNvPr id="2" name="Tabla 1">
+                <a:extLst>
+                  <a:ext uri="{FF2B5EF4-FFF2-40B4-BE49-F238E27FC236}">
+                    <a16:creationId xmlns:a16="http://schemas.microsoft.com/office/drawing/2014/main" id="{B6EBA026-DF03-BC5C-A813-9CD07CD201A5}"/>
+                  </a:ext>
+                </a:extLst>
+              </p:cNvPr>
+              <p:cNvGraphicFramePr>
+                <a:graphicFrameLocks noGrp="1"/>
+              </p:cNvGraphicFramePr>
+              <p:nvPr>
+                <p:extLst>
+                  <p:ext uri="{D42A27DB-BD31-4B8C-83A1-F6EECF244321}">
+                    <p14:modId xmlns:p14="http://schemas.microsoft.com/office/powerpoint/2010/main" val="1555067058"/>
+                  </p:ext>
+                </p:extLst>
+              </p:nvPr>
+            </p:nvGraphicFramePr>
+            <p:xfrm>
+              <a:off x="950168" y="1975618"/>
+              <a:ext cx="10515600" cy="3566160"/>
+            </p:xfrm>
+            <a:graphic>
+              <a:graphicData uri="http://schemas.openxmlformats.org/drawingml/2006/table">
+                <a:tbl>
+                  <a:tblPr>
+                    <a:tableStyleId>{5940675A-B579-460E-94D1-54222C63F5DA}</a:tableStyleId>
+                  </a:tblPr>
+                  <a:tblGrid>
+                    <a:gridCol w="5257800">
+                      <a:extLst>
+                        <a:ext uri="{9D8B030D-6E8A-4147-A177-3AD203B41FA5}">
+                          <a16:colId xmlns:a16="http://schemas.microsoft.com/office/drawing/2014/main" val="3883536860"/>
+                        </a:ext>
+                      </a:extLst>
+                    </a:gridCol>
+                    <a:gridCol w="5257800">
+                      <a:extLst>
+                        <a:ext uri="{9D8B030D-6E8A-4147-A177-3AD203B41FA5}">
+                          <a16:colId xmlns:a16="http://schemas.microsoft.com/office/drawing/2014/main" val="3627606060"/>
+                        </a:ext>
+                      </a:extLst>
+                    </a:gridCol>
+                  </a:tblGrid>
+                  <a:tr h="365760">
+                    <a:tc>
+                      <a:txBody>
+                        <a:bodyPr/>
+                        <a:lstStyle/>
+                        <a:p>
+                          <a:pPr algn="ctr">
+                            <a:buNone/>
+                          </a:pPr>
+                          <a:r>
+                            <a:rPr lang="es-CO" b="1">
+                              <a:effectLst/>
+                            </a:rPr>
+                            <a:t>Elemento Financiero</a:t>
+                          </a:r>
+                        </a:p>
+                      </a:txBody>
+                      <a:tcPr anchor="ctr">
+                        <a:solidFill>
+                          <a:schemeClr val="accent6">
+                            <a:lumMod val="20000"/>
+                            <a:lumOff val="80000"/>
+                          </a:schemeClr>
+                        </a:solidFill>
+                      </a:tcPr>
+                    </a:tc>
+                    <a:tc>
+                      <a:txBody>
+                        <a:bodyPr/>
+                        <a:lstStyle/>
+                        <a:p>
+                          <a:pPr algn="ctr">
+                            <a:buNone/>
+                          </a:pPr>
+                          <a:r>
+                            <a:rPr lang="es-CO" b="1" dirty="0">
+                              <a:effectLst/>
+                            </a:rPr>
+                            <a:t>Cifras y Detalle del Modelo</a:t>
+                          </a:r>
+                        </a:p>
+                      </a:txBody>
+                      <a:tcPr anchor="ctr">
+                        <a:solidFill>
+                          <a:schemeClr val="accent6">
+                            <a:lumMod val="20000"/>
+                            <a:lumOff val="80000"/>
+                          </a:schemeClr>
+                        </a:solidFill>
+                      </a:tcPr>
+                    </a:tc>
+                    <a:extLst>
+                      <a:ext uri="{0D108BD9-81ED-4DB2-BD59-A6C34878D82A}">
+                        <a16:rowId xmlns:a16="http://schemas.microsoft.com/office/drawing/2014/main" val="80401375"/>
+                      </a:ext>
+                    </a:extLst>
+                  </a:tr>
+                  <a:tr h="640080">
+                    <a:tc>
+                      <a:txBody>
+                        <a:bodyPr/>
+                        <a:lstStyle/>
+                        <a:p>
+                          <a:pPr algn="l">
+                            <a:buNone/>
+                          </a:pPr>
+                          <a:r>
+                            <a:rPr lang="es-CO">
+                              <a:effectLst/>
+                            </a:rPr>
+                            <a:t>Inversión y Financiación</a:t>
+                          </a:r>
+                        </a:p>
+                      </a:txBody>
+                      <a:tcPr anchor="ctr"/>
+                    </a:tc>
+                    <a:tc>
+                      <a:txBody>
+                        <a:bodyPr/>
+                        <a:lstStyle/>
+                        <a:p>
+                          <a:endParaRPr lang="es-CO"/>
+                        </a:p>
+                      </a:txBody>
+                      <a:tcPr anchor="ctr">
+                        <a:blipFill>
+                          <a:blip r:embed="rId3"/>
+                          <a:stretch>
+                            <a:fillRect l="-100116" t="-61905" r="-232" b="-415238"/>
+                          </a:stretch>
+                        </a:blipFill>
+                      </a:tcPr>
+                    </a:tc>
+                    <a:extLst>
+                      <a:ext uri="{0D108BD9-81ED-4DB2-BD59-A6C34878D82A}">
+                        <a16:rowId xmlns:a16="http://schemas.microsoft.com/office/drawing/2014/main" val="1833631116"/>
+                      </a:ext>
+                    </a:extLst>
+                  </a:tr>
+                  <a:tr h="640080">
+                    <a:tc>
+                      <a:txBody>
+                        <a:bodyPr/>
+                        <a:lstStyle/>
+                        <a:p>
+                          <a:pPr algn="l">
+                            <a:buNone/>
+                          </a:pPr>
+                          <a:r>
+                            <a:rPr lang="es-CO">
+                              <a:effectLst/>
+                            </a:rPr>
+                            <a:t>Destino de los Recursos</a:t>
+                          </a:r>
+                        </a:p>
+                      </a:txBody>
+                      <a:tcPr anchor="ctr"/>
+                    </a:tc>
+                    <a:tc>
+                      <a:txBody>
+                        <a:bodyPr/>
+                        <a:lstStyle/>
+                        <a:p>
+                          <a:pPr algn="l">
+                            <a:buNone/>
+                          </a:pPr>
+                          <a:r>
+                            <a:rPr lang="es-CO" dirty="0">
+                              <a:effectLst/>
+                            </a:rPr>
+                            <a:t>Cómputo: $9.85M • Muebles: $4.5M • Trámites legales/SIC: $2.8M • Capital de trabajo: $30.19M</a:t>
+                          </a:r>
+                        </a:p>
+                      </a:txBody>
+                      <a:tcPr anchor="ctr"/>
+                    </a:tc>
+                    <a:extLst>
+                      <a:ext uri="{0D108BD9-81ED-4DB2-BD59-A6C34878D82A}">
+                        <a16:rowId xmlns:a16="http://schemas.microsoft.com/office/drawing/2014/main" val="1801340951"/>
+                      </a:ext>
+                    </a:extLst>
+                  </a:tr>
+                  <a:tr h="640080">
+                    <a:tc>
+                      <a:txBody>
+                        <a:bodyPr/>
+                        <a:lstStyle/>
+                        <a:p>
+                          <a:pPr algn="l">
+                            <a:buNone/>
+                          </a:pPr>
+                          <a:r>
+                            <a:rPr lang="es-CO">
+                              <a:effectLst/>
+                            </a:rPr>
+                            <a:t>Ventas a 5 Años</a:t>
+                          </a:r>
+                        </a:p>
+                      </a:txBody>
+                      <a:tcPr anchor="ctr"/>
+                    </a:tc>
+                    <a:tc>
+                      <a:txBody>
+                        <a:bodyPr/>
+                        <a:lstStyle/>
+                        <a:p>
+                          <a:pPr algn="l">
+                            <a:buNone/>
+                          </a:pPr>
+                          <a:r>
+                            <a:rPr lang="es-CO">
+                              <a:effectLst/>
+                            </a:rPr>
+                            <a:t>Año 1: 12 lic. ($54M) ➔ Año 3: 38 lic. ($189M) ➔ Año 5: 68 lic. ($358M)</a:t>
+                          </a:r>
+                        </a:p>
+                      </a:txBody>
+                      <a:tcPr anchor="ctr"/>
+                    </a:tc>
+                    <a:extLst>
+                      <a:ext uri="{0D108BD9-81ED-4DB2-BD59-A6C34878D82A}">
+                        <a16:rowId xmlns:a16="http://schemas.microsoft.com/office/drawing/2014/main" val="3150748626"/>
+                      </a:ext>
+                    </a:extLst>
+                  </a:tr>
+                  <a:tr h="640080">
+                    <a:tc>
+                      <a:txBody>
+                        <a:bodyPr/>
+                        <a:lstStyle/>
+                        <a:p>
+                          <a:pPr algn="l">
+                            <a:buNone/>
+                          </a:pPr>
+                          <a:r>
+                            <a:rPr lang="es-CO">
+                              <a:effectLst/>
+                            </a:rPr>
+                            <a:t>Indicadores (TIO 15%)</a:t>
+                          </a:r>
+                        </a:p>
+                      </a:txBody>
+                      <a:tcPr anchor="ctr"/>
+                    </a:tc>
+                    <a:tc>
+                      <a:txBody>
+                        <a:bodyPr/>
+                        <a:lstStyle/>
+                        <a:p>
+                          <a:pPr algn="l">
+                            <a:buNone/>
+                          </a:pPr>
+                          <a:r>
+                            <a:rPr lang="es-CO">
+                              <a:effectLst/>
+                            </a:rPr>
+                            <a:t>VPN: +$125.340.830 COP | TIR: 62.88% | Recuperación (PRI): 2.4 años</a:t>
+                          </a:r>
+                        </a:p>
+                      </a:txBody>
+                      <a:tcPr anchor="ctr"/>
+                    </a:tc>
+                    <a:extLst>
+                      <a:ext uri="{0D108BD9-81ED-4DB2-BD59-A6C34878D82A}">
+                        <a16:rowId xmlns:a16="http://schemas.microsoft.com/office/drawing/2014/main" val="1683781722"/>
+                      </a:ext>
+                    </a:extLst>
+                  </a:tr>
+                  <a:tr h="640080">
+                    <a:tc>
+                      <a:txBody>
+                        <a:bodyPr/>
+                        <a:lstStyle/>
+                        <a:p>
+                          <a:pPr algn="l">
+                            <a:buNone/>
+                          </a:pPr>
+                          <a:r>
+                            <a:rPr lang="es-CO">
+                              <a:effectLst/>
+                            </a:rPr>
+                            <a:t>Punto de Equilibrio</a:t>
+                          </a:r>
+                        </a:p>
+                      </a:txBody>
+                      <a:tcPr anchor="ctr"/>
+                    </a:tc>
+                    <a:tc>
+                      <a:txBody>
+                        <a:bodyPr/>
+                        <a:lstStyle/>
+                        <a:p>
+                          <a:pPr algn="l">
+                            <a:buNone/>
+                          </a:pPr>
+                          <a:r>
+                            <a:rPr lang="es-CO" dirty="0">
+                              <a:effectLst/>
+                            </a:rPr>
+                            <a:t>32.2 licencias Plan Lean (Margen Bruto: 93.07% | Relación B/C: 1.30)</a:t>
+                          </a:r>
+                        </a:p>
+                      </a:txBody>
+                      <a:tcPr anchor="ctr"/>
+                    </a:tc>
+                    <a:extLst>
+                      <a:ext uri="{0D108BD9-81ED-4DB2-BD59-A6C34878D82A}">
+                        <a16:rowId xmlns:a16="http://schemas.microsoft.com/office/drawing/2014/main" val="4085677177"/>
+                      </a:ext>
+                    </a:extLst>
+                  </a:tr>
+                </a:tbl>
+              </a:graphicData>
+            </a:graphic>
+          </p:graphicFrame>
+        </mc:Fallback>
+      </mc:AlternateContent>
     </p:spTree>
     <p:extLst>
       <p:ext uri="{BB962C8B-B14F-4D97-AF65-F5344CB8AC3E}">
@@ -8311,8 +8846,8 @@
         </p:nvSpPr>
         <p:spPr>
           <a:xfrm>
-            <a:off x="765496" y="1766934"/>
-            <a:ext cx="6094602" cy="3000565"/>
+            <a:off x="513570" y="1584448"/>
+            <a:ext cx="6094602" cy="4524315"/>
           </a:xfrm>
           <a:prstGeom prst="rect">
             <a:avLst/>
@@ -8325,102 +8860,96 @@
           </a:bodyPr>
           <a:lstStyle/>
           <a:p>
-            <a:pPr algn="just">
-              <a:lnSpc>
-                <a:spcPct val="107000"/>
-              </a:lnSpc>
-              <a:spcAft>
-                <a:spcPts val="800"/>
-              </a:spcAft>
-            </a:pPr>
-            <a:endParaRPr lang="es-ES" sz="2800" b="1" dirty="0">
-              <a:solidFill>
-                <a:srgbClr val="4D4D4C"/>
-              </a:solidFill>
-              <a:latin typeface="Josefin Sans" panose="00000500000000000000" pitchFamily="2" charset="0"/>
-            </a:endParaRPr>
-          </a:p>
-          <a:p>
-            <a:pPr algn="just">
-              <a:lnSpc>
-                <a:spcPct val="107000"/>
-              </a:lnSpc>
-              <a:spcAft>
-                <a:spcPts val="800"/>
-              </a:spcAft>
-            </a:pPr>
-            <a:r>
-              <a:rPr lang="es-ES" dirty="0">
-                <a:solidFill>
-                  <a:schemeClr val="bg1">
-                    <a:lumMod val="50000"/>
-                  </a:schemeClr>
-                </a:solidFill>
-                <a:latin typeface="Josefin Sans" panose="00000500000000000000" pitchFamily="2" charset="0"/>
-              </a:rPr>
-              <a:t>Presente de manera gráfica a tus compañeros de aventura y destaca la interdisciplinariedad para fortalecer el Modelo de Negocio.</a:t>
-            </a:r>
-          </a:p>
-          <a:p>
-            <a:pPr algn="just">
-              <a:lnSpc>
-                <a:spcPct val="107000"/>
-              </a:lnSpc>
-              <a:spcAft>
-                <a:spcPts val="800"/>
-              </a:spcAft>
-            </a:pPr>
-            <a:r>
-              <a:rPr lang="es-ES" dirty="0">
-                <a:solidFill>
-                  <a:schemeClr val="bg1">
-                    <a:lumMod val="50000"/>
-                  </a:schemeClr>
-                </a:solidFill>
-                <a:latin typeface="Josefin Sans" panose="00000500000000000000" pitchFamily="2" charset="0"/>
-              </a:rPr>
-              <a:t>(Tiempo sugerido: 1 minuto 30 segundos)</a:t>
-            </a:r>
-            <a:endParaRPr lang="es-ES" sz="1600" dirty="0">
-              <a:solidFill>
-                <a:srgbClr val="4D4D4C"/>
-              </a:solidFill>
-              <a:latin typeface="Josefin Sans" panose="00000500000000000000" pitchFamily="2" charset="0"/>
-            </a:endParaRPr>
-          </a:p>
-          <a:p>
-            <a:pPr algn="just">
-              <a:lnSpc>
-                <a:spcPct val="107000"/>
-              </a:lnSpc>
-              <a:spcAft>
-                <a:spcPts val="800"/>
-              </a:spcAft>
-            </a:pPr>
-            <a:endParaRPr lang="es-ES" sz="1600" dirty="0">
-              <a:solidFill>
-                <a:srgbClr val="4D4D4C"/>
-              </a:solidFill>
-              <a:latin typeface="Josefin Sans" panose="00000500000000000000" pitchFamily="2" charset="0"/>
-            </a:endParaRPr>
-          </a:p>
-          <a:p>
-            <a:pPr algn="just">
-              <a:lnSpc>
-                <a:spcPct val="107000"/>
-              </a:lnSpc>
-              <a:spcAft>
-                <a:spcPts val="800"/>
-              </a:spcAft>
-            </a:pPr>
-            <a:r>
-              <a:rPr lang="es-ES" dirty="0">
-                <a:solidFill>
-                  <a:srgbClr val="00B050"/>
-                </a:solidFill>
-                <a:latin typeface="Josefin Sans" panose="00000500000000000000" pitchFamily="2" charset="0"/>
-              </a:rPr>
-              <a:t>¡Ustedes son el equipo indicado para conducir al éxito este proyecto!</a:t>
+            <a:r>
+              <a:rPr lang="es-CO" sz="1600" b="1" dirty="0"/>
+              <a:t>Liderazgo del Proyecto y Visión de Equipo</a:t>
+            </a:r>
+          </a:p>
+          <a:p>
+            <a:endParaRPr lang="es-CO" sz="1600" dirty="0"/>
+          </a:p>
+          <a:p>
+            <a:r>
+              <a:rPr lang="es-CO" sz="1600" dirty="0"/>
+              <a:t>•</a:t>
+            </a:r>
+            <a:r>
+              <a:rPr lang="es-CO" sz="1600" b="1" dirty="0"/>
+              <a:t>Diego Alfonso Tapia Salazar — Fundador y Líder Técnico:</a:t>
+            </a:r>
+          </a:p>
+          <a:p>
+            <a:br>
+              <a:rPr lang="es-CO" sz="1600" dirty="0"/>
+            </a:br>
+            <a:r>
+              <a:rPr lang="es-CO" sz="1600" dirty="0"/>
+              <a:t>    – Tecnólogo en formación ADSO (SENA) | Estudiante de Ingeniería de Sistemas (Universidad EAN).</a:t>
+            </a:r>
+            <a:br>
+              <a:rPr lang="es-CO" sz="1600" dirty="0"/>
+            </a:br>
+            <a:r>
+              <a:rPr lang="es-CO" sz="1600" dirty="0"/>
+              <a:t>    – Trayectoria en Seguridad de la Información, Continuidad del Negocio, Gestión de Riesgos y Gobernanza.</a:t>
+            </a:r>
+          </a:p>
+          <a:p>
+            <a:br>
+              <a:rPr lang="es-CO" sz="1600" dirty="0"/>
+            </a:br>
+            <a:r>
+              <a:rPr lang="es-CO" sz="1600" dirty="0"/>
+              <a:t>• </a:t>
+            </a:r>
+            <a:r>
+              <a:rPr lang="es-CO" sz="1600" b="1" dirty="0"/>
+              <a:t>Acompañamiento y Seguimiento Institucional:</a:t>
+            </a:r>
+          </a:p>
+          <a:p>
+            <a:br>
+              <a:rPr lang="es-CO" sz="1600" dirty="0"/>
+            </a:br>
+            <a:r>
+              <a:rPr lang="es-CO" sz="1600" dirty="0"/>
+              <a:t>    – </a:t>
+            </a:r>
+            <a:r>
+              <a:rPr lang="es-CO" sz="1600" b="1" dirty="0"/>
+              <a:t>Instructor John Fernando Méndez Medina:</a:t>
+            </a:r>
+            <a:r>
+              <a:rPr lang="es-CO" sz="1600" dirty="0"/>
+              <a:t> Apoyo metodológico y seguimiento técnico en la etapa productiva (SENA).</a:t>
+            </a:r>
+            <a:br>
+              <a:rPr lang="es-CO" sz="1600" dirty="0"/>
+            </a:br>
+            <a:r>
+              <a:rPr lang="es-CO" sz="1600" dirty="0"/>
+              <a:t>• </a:t>
+            </a:r>
+          </a:p>
+          <a:p>
+            <a:r>
+              <a:rPr lang="es-CO" sz="1600" b="1" dirty="0"/>
+              <a:t>La Necesidad Interdisciplinaria para la Puesta en Marcha Real:</a:t>
+            </a:r>
+            <a:br>
+              <a:rPr lang="es-CO" sz="1600" dirty="0"/>
+            </a:br>
+            <a:r>
+              <a:rPr lang="es-CO" sz="1600" dirty="0"/>
+              <a:t>    – Reconocimiento de que llevar </a:t>
+            </a:r>
+            <a:r>
+              <a:rPr lang="es-CO" sz="1600" dirty="0" err="1"/>
+              <a:t>TalentLab</a:t>
+            </a:r>
+            <a:r>
+              <a:rPr lang="es-CO" sz="1600" dirty="0"/>
+              <a:t> a entornos laborales reales requiere sumar perfiles en Psicopedagogía, Ciencia de Datos y Gestión Comercial B2B.</a:t>
             </a:r>
           </a:p>
         </p:txBody>
@@ -8657,54 +9186,6 @@
           </a:fontRef>
         </p:style>
       </p:cxnSp>
-      <p:pic>
-        <p:nvPicPr>
-          <p:cNvPr id="7" name="Picture 2" descr="Primer Plano, De, Mano Humana">
-            <a:extLst>
-              <a:ext uri="{FF2B5EF4-FFF2-40B4-BE49-F238E27FC236}">
-                <a16:creationId xmlns:a16="http://schemas.microsoft.com/office/drawing/2014/main" id="{52B1F841-6C16-EEAE-014D-C52589575C4B}"/>
-              </a:ext>
-            </a:extLst>
-          </p:cNvPr>
-          <p:cNvPicPr>
-            <a:picLocks noChangeAspect="1" noChangeArrowheads="1"/>
-          </p:cNvPicPr>
-          <p:nvPr/>
-        </p:nvPicPr>
-        <p:blipFill>
-          <a:blip r:embed="rId2">
-            <a:lum bright="70000" contrast="-70000"/>
-            <a:extLst>
-              <a:ext uri="{28A0092B-C50C-407E-A947-70E740481C1C}">
-                <a14:useLocalDpi xmlns:a14="http://schemas.microsoft.com/office/drawing/2010/main" val="0"/>
-              </a:ext>
-            </a:extLst>
-          </a:blip>
-          <a:srcRect/>
-          <a:stretch>
-            <a:fillRect/>
-          </a:stretch>
-        </p:blipFill>
-        <p:spPr bwMode="auto">
-          <a:xfrm>
-            <a:off x="6303565" y="2198439"/>
-            <a:ext cx="4123951" cy="2744421"/>
-          </a:xfrm>
-          <a:prstGeom prst="rect">
-            <a:avLst/>
-          </a:prstGeom>
-          <a:noFill/>
-          <a:extLst>
-            <a:ext uri="{909E8E84-426E-40DD-AFC4-6F175D3DCCD1}">
-              <a14:hiddenFill xmlns:a14="http://schemas.microsoft.com/office/drawing/2010/main">
-                <a:solidFill>
-                  <a:srgbClr val="FFFFFF"/>
-                </a:solidFill>
-              </a14:hiddenFill>
-            </a:ext>
-          </a:extLst>
-        </p:spPr>
-      </p:pic>
       <p:sp>
         <p:nvSpPr>
           <p:cNvPr id="8" name="CuadroTexto 7">
@@ -8720,7 +9201,7 @@
         <p:spPr>
           <a:xfrm>
             <a:off x="427354" y="1460208"/>
-            <a:ext cx="4471039" cy="4359911"/>
+            <a:ext cx="6356477" cy="5186292"/>
           </a:xfrm>
           <a:prstGeom prst="rect">
             <a:avLst/>
@@ -8733,125 +9214,85 @@
           </a:bodyPr>
           <a:lstStyle/>
           <a:p>
-            <a:pPr algn="just">
-              <a:lnSpc>
-                <a:spcPct val="107000"/>
-              </a:lnSpc>
-              <a:spcAft>
-                <a:spcPts val="800"/>
-              </a:spcAft>
-            </a:pPr>
-            <a:r>
-              <a:rPr lang="es-ES" sz="1600" dirty="0">
-                <a:solidFill>
-                  <a:schemeClr val="bg1">
-                    <a:lumMod val="50000"/>
-                  </a:schemeClr>
-                </a:solidFill>
-                <a:latin typeface="Josefin Sans" panose="00000500000000000000" pitchFamily="2" charset="0"/>
-              </a:rPr>
-              <a:t>Cuenta </a:t>
-            </a:r>
-            <a:r>
-              <a:rPr lang="es-ES" sz="1600" dirty="0">
-                <a:solidFill>
-                  <a:srgbClr val="00B050"/>
-                </a:solidFill>
-                <a:latin typeface="Josefin Sans" panose="00000500000000000000" pitchFamily="2" charset="0"/>
-              </a:rPr>
-              <a:t>tu historia </a:t>
-            </a:r>
-            <a:r>
-              <a:rPr lang="es-ES" sz="1600" dirty="0">
-                <a:solidFill>
-                  <a:schemeClr val="bg1">
-                    <a:lumMod val="50000"/>
-                  </a:schemeClr>
-                </a:solidFill>
-                <a:latin typeface="Josefin Sans" panose="00000500000000000000" pitchFamily="2" charset="0"/>
-              </a:rPr>
-              <a:t>de manera general, indicando tu formación académica, experiencia o relación con la problemática o necesidad.</a:t>
-            </a:r>
-          </a:p>
-          <a:p>
-            <a:pPr algn="just">
-              <a:lnSpc>
-                <a:spcPct val="107000"/>
-              </a:lnSpc>
-              <a:spcAft>
-                <a:spcPts val="800"/>
-              </a:spcAft>
-            </a:pPr>
-            <a:r>
-              <a:rPr lang="es-ES" sz="1600" dirty="0">
-                <a:solidFill>
-                  <a:schemeClr val="bg1">
-                    <a:lumMod val="50000"/>
-                  </a:schemeClr>
-                </a:solidFill>
-                <a:latin typeface="Josefin Sans" panose="00000500000000000000" pitchFamily="2" charset="0"/>
-              </a:rPr>
-              <a:t>Proyecta seguridad, autenticidad, humildad y tenacidad. </a:t>
-            </a:r>
-          </a:p>
-          <a:p>
-            <a:pPr algn="just">
-              <a:lnSpc>
-                <a:spcPct val="107000"/>
-              </a:lnSpc>
-              <a:spcAft>
-                <a:spcPts val="800"/>
-              </a:spcAft>
-            </a:pPr>
-            <a:r>
-              <a:rPr lang="es-ES" sz="1600" dirty="0">
-                <a:solidFill>
-                  <a:schemeClr val="bg1">
-                    <a:lumMod val="50000"/>
-                  </a:schemeClr>
-                </a:solidFill>
-                <a:latin typeface="Josefin Sans" panose="00000500000000000000" pitchFamily="2" charset="0"/>
-              </a:rPr>
-              <a:t>¡Tu fotografía sería algo genial!</a:t>
-            </a:r>
-          </a:p>
-          <a:p>
-            <a:pPr algn="just">
-              <a:lnSpc>
-                <a:spcPct val="107000"/>
-              </a:lnSpc>
-              <a:spcAft>
-                <a:spcPts val="800"/>
-              </a:spcAft>
-            </a:pPr>
-            <a:endParaRPr lang="es-ES" sz="1600" dirty="0">
-              <a:solidFill>
-                <a:schemeClr val="bg1">
-                  <a:lumMod val="50000"/>
-                </a:schemeClr>
-              </a:solidFill>
-              <a:latin typeface="Josefin Sans" panose="00000500000000000000" pitchFamily="2" charset="0"/>
-            </a:endParaRPr>
-          </a:p>
-          <a:p>
-            <a:pPr algn="just">
-              <a:lnSpc>
-                <a:spcPct val="107000"/>
-              </a:lnSpc>
-              <a:spcAft>
-                <a:spcPts val="800"/>
-              </a:spcAft>
-            </a:pPr>
-            <a:r>
-              <a:rPr lang="es-ES" sz="1600" dirty="0">
-                <a:solidFill>
-                  <a:schemeClr val="bg1">
-                    <a:lumMod val="50000"/>
-                  </a:schemeClr>
-                </a:solidFill>
-                <a:latin typeface="Josefin Sans" panose="00000500000000000000" pitchFamily="2" charset="0"/>
-              </a:rPr>
-              <a:t>(Tiempo sugerido: 30 segundos)</a:t>
+            <a:r>
+              <a:rPr lang="es-CO" sz="1600" b="1" dirty="0"/>
+              <a:t>Diego Alfonso Tapia Salazar</a:t>
+            </a:r>
+          </a:p>
+          <a:p>
+            <a:endParaRPr lang="es-CO" sz="1600" dirty="0"/>
+          </a:p>
+          <a:p>
+            <a:r>
+              <a:rPr lang="es-CO" sz="1600" dirty="0"/>
+              <a:t>• </a:t>
+            </a:r>
+            <a:r>
+              <a:rPr lang="es-CO" sz="1600" b="1" dirty="0"/>
+              <a:t>Formación:</a:t>
+            </a:r>
+            <a:r>
+              <a:rPr lang="es-CO" sz="1600" dirty="0"/>
+              <a:t> Tecnólogo en formación ADSO (SENA) | Estudiante de Ingeniería de Sistemas (Universidad EAN)</a:t>
+            </a:r>
+          </a:p>
+          <a:p>
+            <a:br>
+              <a:rPr lang="es-CO" sz="1600" dirty="0"/>
+            </a:br>
+            <a:r>
+              <a:rPr lang="es-CO" sz="1600" dirty="0"/>
+              <a:t>• </a:t>
+            </a:r>
+            <a:r>
+              <a:rPr lang="es-CO" sz="1600" b="1" dirty="0"/>
+              <a:t>Trayectoria:</a:t>
+            </a:r>
+            <a:r>
+              <a:rPr lang="es-CO" sz="1600" dirty="0"/>
+              <a:t> Seguridad de la Información, Continuidad del Negocio, Análisis de Riesgos y Gobernanza de TI</a:t>
+            </a:r>
+          </a:p>
+          <a:p>
+            <a:br>
+              <a:rPr lang="es-CO" sz="1600" dirty="0"/>
+            </a:br>
+            <a:r>
+              <a:rPr lang="es-CO" sz="1600" dirty="0"/>
+              <a:t>• </a:t>
+            </a:r>
+            <a:r>
+              <a:rPr lang="es-CO" sz="1600" b="1" dirty="0"/>
+              <a:t>La Oportunidad:</a:t>
+            </a:r>
+            <a:r>
+              <a:rPr lang="es-CO" sz="1600" dirty="0"/>
+              <a:t> La información académica existe, pero hoy no se utiliza a tiempo para anticiparse y prevenir la deserción estudiantil</a:t>
+            </a:r>
+          </a:p>
+          <a:p>
+            <a:br>
+              <a:rPr lang="es-CO" sz="1600" dirty="0"/>
+            </a:br>
+            <a:r>
+              <a:rPr lang="es-CO" sz="1600" dirty="0"/>
+              <a:t>• </a:t>
+            </a:r>
+            <a:r>
+              <a:rPr lang="es-CO" sz="1600" b="1" dirty="0"/>
+              <a:t>Mi Propósito:</a:t>
+            </a:r>
+            <a:r>
+              <a:rPr lang="es-CO" sz="1600" dirty="0"/>
+              <a:t> </a:t>
+            </a:r>
+            <a:r>
+              <a:rPr lang="es-CO" sz="1600" b="1" dirty="0" err="1"/>
+              <a:t>TalentLab</a:t>
+            </a:r>
+            <a:r>
+              <a:rPr lang="es-CO" sz="1600" dirty="0"/>
+              <a:t>, una plataforma confiable y segura que transforma los datos en alertas tempranas de acompañamiento y preparación laboral.</a:t>
             </a:r>
           </a:p>
           <a:p>
@@ -8947,7 +9388,7 @@
           <p:nvPr/>
         </p:nvPicPr>
         <p:blipFill>
-          <a:blip r:embed="rId3">
+          <a:blip r:embed="rId2">
             <a:extLst>
               <a:ext uri="{28A0092B-C50C-407E-A947-70E740481C1C}">
                 <a14:useLocalDpi xmlns:a14="http://schemas.microsoft.com/office/drawing/2010/main" val="0"/>
@@ -8977,6 +9418,36 @@
               </a14:hiddenFill>
             </a:ext>
           </a:extLst>
+        </p:spPr>
+      </p:pic>
+      <p:pic>
+        <p:nvPicPr>
+          <p:cNvPr id="2" name="Imagen 1" descr="No hay ninguna descripción de la foto disponible.">
+            <a:extLst>
+              <a:ext uri="{FF2B5EF4-FFF2-40B4-BE49-F238E27FC236}">
+                <a16:creationId xmlns:a16="http://schemas.microsoft.com/office/drawing/2014/main" id="{1FEF09E1-F959-69E8-5FE3-A7FA46E0CBB0}"/>
+              </a:ext>
+            </a:extLst>
+          </p:cNvPr>
+          <p:cNvPicPr>
+            <a:picLocks noChangeAspect="1"/>
+          </p:cNvPicPr>
+          <p:nvPr/>
+        </p:nvPicPr>
+        <p:blipFill>
+          <a:blip r:embed="rId3"/>
+          <a:stretch>
+            <a:fillRect/>
+          </a:stretch>
+        </p:blipFill>
+        <p:spPr>
+          <a:xfrm>
+            <a:off x="7297112" y="1649398"/>
+            <a:ext cx="3621444" cy="3621444"/>
+          </a:xfrm>
+          <a:prstGeom prst="rect">
+            <a:avLst/>
+          </a:prstGeom>
         </p:spPr>
       </p:pic>
     </p:spTree>
@@ -9207,7 +9678,7 @@
         <p:spPr>
           <a:xfrm>
             <a:off x="427354" y="1460208"/>
-            <a:ext cx="4471039" cy="5808513"/>
+            <a:ext cx="6122736" cy="5894178"/>
           </a:xfrm>
           <a:prstGeom prst="rect">
             <a:avLst/>
@@ -9220,108 +9691,81 @@
           </a:bodyPr>
           <a:lstStyle/>
           <a:p>
-            <a:pPr lvl="1" algn="just">
-              <a:lnSpc>
-                <a:spcPct val="107000"/>
-              </a:lnSpc>
-              <a:spcAft>
-                <a:spcPts val="800"/>
-              </a:spcAft>
-            </a:pPr>
-            <a:r>
-              <a:rPr lang="es-ES" dirty="0">
-                <a:solidFill>
-                  <a:schemeClr val="bg1">
-                    <a:lumMod val="50000"/>
-                  </a:schemeClr>
-                </a:solidFill>
-                <a:latin typeface="Josefin Sans" panose="00000500000000000000" pitchFamily="2" charset="0"/>
-              </a:rPr>
-              <a:t>Se expone el problema o necesidad, como pregunta o estadística (Cifra clave) para captar la atención del Jurado.</a:t>
-            </a:r>
-          </a:p>
-          <a:p>
-            <a:pPr lvl="1" algn="just">
-              <a:lnSpc>
-                <a:spcPct val="107000"/>
-              </a:lnSpc>
-              <a:spcAft>
-                <a:spcPts val="800"/>
-              </a:spcAft>
-            </a:pPr>
-            <a:r>
-              <a:rPr lang="es-ES" dirty="0">
-                <a:solidFill>
-                  <a:schemeClr val="bg1">
-                    <a:lumMod val="50000"/>
-                  </a:schemeClr>
-                </a:solidFill>
-                <a:latin typeface="Josefin Sans" panose="00000500000000000000" pitchFamily="2" charset="0"/>
-              </a:rPr>
-              <a:t>¿Cuánto tiempo gastas en…?</a:t>
-            </a:r>
-          </a:p>
-          <a:p>
-            <a:pPr lvl="1" algn="just">
-              <a:lnSpc>
-                <a:spcPct val="107000"/>
-              </a:lnSpc>
-              <a:spcAft>
-                <a:spcPts val="800"/>
-              </a:spcAft>
-            </a:pPr>
-            <a:r>
-              <a:rPr lang="es-ES" dirty="0">
-                <a:solidFill>
-                  <a:schemeClr val="bg1">
-                    <a:lumMod val="50000"/>
-                  </a:schemeClr>
-                </a:solidFill>
-                <a:latin typeface="Josefin Sans" panose="00000500000000000000" pitchFamily="2" charset="0"/>
-              </a:rPr>
-              <a:t>¿A quién de aquí no le ha pasado que…?</a:t>
-            </a:r>
-          </a:p>
-          <a:p>
-            <a:pPr lvl="1" algn="just">
-              <a:lnSpc>
-                <a:spcPct val="107000"/>
-              </a:lnSpc>
-              <a:spcAft>
-                <a:spcPts val="800"/>
-              </a:spcAft>
-            </a:pPr>
-            <a:r>
-              <a:rPr lang="es-ES" dirty="0">
-                <a:solidFill>
-                  <a:schemeClr val="bg1">
-                    <a:lumMod val="50000"/>
-                  </a:schemeClr>
-                </a:solidFill>
-                <a:latin typeface="Josefin Sans" panose="00000500000000000000" pitchFamily="2" charset="0"/>
-              </a:rPr>
-              <a:t>Comienza por una historia / anécdota / acontecimiento relacionado con el problema/necesidad.</a:t>
-            </a:r>
-          </a:p>
-          <a:p>
-            <a:pPr algn="just">
-              <a:lnSpc>
-                <a:spcPct val="107000"/>
-              </a:lnSpc>
-              <a:spcAft>
-                <a:spcPts val="800"/>
-              </a:spcAft>
-            </a:pPr>
-            <a:r>
-              <a:rPr lang="es-ES" dirty="0">
-                <a:solidFill>
-                  <a:schemeClr val="bg1">
-                    <a:lumMod val="50000"/>
-                  </a:schemeClr>
-                </a:solidFill>
-                <a:latin typeface="Josefin Sans" panose="00000500000000000000" pitchFamily="2" charset="0"/>
-              </a:rPr>
-              <a:t>(Tiempo sugerido: 1 minuto)</a:t>
+            <a:r>
+              <a:rPr lang="es-CO" b="1" dirty="0"/>
+              <a:t>¿Sabían que en Colombia más del 33% de los estudiantes técnicos y tecnológicos desertan antes de graduarse?</a:t>
+            </a:r>
+            <a:r>
+              <a:rPr lang="es-CO" dirty="0"/>
+              <a:t> </a:t>
+            </a:r>
+          </a:p>
+          <a:p>
+            <a:endParaRPr lang="es-CO" dirty="0"/>
+          </a:p>
+          <a:p>
+            <a:r>
+              <a:rPr lang="es-CO" dirty="0"/>
+              <a:t>• </a:t>
+            </a:r>
+            <a:r>
+              <a:rPr lang="es-CO" b="1" dirty="0"/>
+              <a:t>Deserción Silenciosa:</a:t>
+            </a:r>
+            <a:r>
+              <a:rPr lang="es-CO" dirty="0"/>
+              <a:t> Detección tardía; las alertas llegan cuando el estudiante ya abandonó el aula</a:t>
+            </a:r>
+          </a:p>
+          <a:p>
+            <a:br>
+              <a:rPr lang="es-CO" dirty="0"/>
+            </a:br>
+            <a:r>
+              <a:rPr lang="es-CO" dirty="0"/>
+              <a:t>• </a:t>
+            </a:r>
+            <a:r>
+              <a:rPr lang="es-CO" b="1" dirty="0"/>
+              <a:t>Brecha de Empleabilidad :</a:t>
+            </a:r>
+            <a:r>
+              <a:rPr lang="es-CO" dirty="0"/>
+              <a:t> Inseguridad y falta de preparación práctica para entrevistas técnicas y habilidades blandas</a:t>
+            </a:r>
+          </a:p>
+          <a:p>
+            <a:br>
+              <a:rPr lang="es-CO" dirty="0"/>
+            </a:br>
+            <a:r>
+              <a:rPr lang="es-CO" dirty="0"/>
+              <a:t>• </a:t>
+            </a:r>
+            <a:r>
+              <a:rPr lang="es-CO" b="1" dirty="0"/>
+              <a:t>Desconexión con Egresados:</a:t>
+            </a:r>
+            <a:r>
+              <a:rPr lang="es-CO" dirty="0"/>
+              <a:t> El capital social y la experiencia de los graduados están desarticulados y desaprovechados</a:t>
+            </a:r>
+          </a:p>
+          <a:p>
+            <a:br>
+              <a:rPr lang="es-CO" dirty="0"/>
+            </a:br>
+            <a:r>
+              <a:rPr lang="es-CO" dirty="0"/>
+              <a:t>• </a:t>
+            </a:r>
+            <a:r>
+              <a:rPr lang="es-CO" b="1" dirty="0"/>
+              <a:t>Limitación Actual:</a:t>
+            </a:r>
+            <a:r>
+              <a:rPr lang="es-CO" dirty="0"/>
+              <a:t> Los sistemas LMS tradicionales (Moodle, Q10) son meramente reactivos y de registro de notas, sin analítica predictiva</a:t>
             </a:r>
           </a:p>
           <a:p>
@@ -9542,7 +9986,7 @@
         <p:spPr>
           <a:xfrm>
             <a:off x="427354" y="1460208"/>
-            <a:ext cx="4471039" cy="4063485"/>
+            <a:ext cx="5310717" cy="6035114"/>
           </a:xfrm>
           <a:prstGeom prst="rect">
             <a:avLst/>
@@ -9555,108 +9999,163 @@
           </a:bodyPr>
           <a:lstStyle/>
           <a:p>
-            <a:pPr algn="just">
+            <a:pPr>
               <a:lnSpc>
-                <a:spcPct val="107000"/>
+                <a:spcPct val="100000"/>
               </a:lnSpc>
               <a:spcAft>
                 <a:spcPts val="800"/>
               </a:spcAft>
             </a:pPr>
             <a:r>
-              <a:rPr lang="es-ES" sz="1600" dirty="0">
-                <a:solidFill>
-                  <a:schemeClr val="bg1">
-                    <a:lumMod val="50000"/>
-                  </a:schemeClr>
-                </a:solidFill>
-                <a:latin typeface="Josefin Sans" panose="00000500000000000000" pitchFamily="2" charset="0"/>
-              </a:rPr>
-              <a:t>Explique a quien impacta con el problema identificado.</a:t>
-            </a:r>
-          </a:p>
-          <a:p>
-            <a:pPr algn="just">
+              <a:rPr lang="es-CO" sz="1600" b="1" dirty="0"/>
+              <a:t>El Protagonista (Cliente B2B Decisor):</a:t>
+            </a:r>
+            <a:r>
+              <a:rPr lang="es-CO" sz="1600" dirty="0"/>
+              <a:t> Directores de Bienestar Institucional, Decanos y Rectores de instituciones técnicas, tecnológicas e IES intermedias</a:t>
+            </a:r>
+          </a:p>
+          <a:p>
+            <a:pPr>
               <a:lnSpc>
-                <a:spcPct val="107000"/>
+                <a:spcPct val="100000"/>
               </a:lnSpc>
               <a:spcAft>
                 <a:spcPts val="800"/>
               </a:spcAft>
             </a:pPr>
-            <a:r>
-              <a:rPr lang="es-ES" sz="1600" dirty="0">
-                <a:solidFill>
-                  <a:schemeClr val="bg1">
-                    <a:lumMod val="50000"/>
-                  </a:schemeClr>
-                </a:solidFill>
-                <a:latin typeface="Josefin Sans" panose="00000500000000000000" pitchFamily="2" charset="0"/>
-              </a:rPr>
-              <a:t>Cuál es el protagonista de mi modelo de negocio</a:t>
-            </a:r>
-          </a:p>
-          <a:p>
-            <a:pPr algn="just">
+            <a:br>
+              <a:rPr lang="es-CO" sz="1600" dirty="0"/>
+            </a:br>
+            <a:r>
+              <a:rPr lang="es-CO" sz="1600" dirty="0"/>
+              <a:t>• </a:t>
+            </a:r>
+            <a:r>
+              <a:rPr lang="es-CO" sz="1600" b="1" dirty="0"/>
+              <a:t>El Impacto en el Cliente:</a:t>
+            </a:r>
+            <a:r>
+              <a:rPr lang="es-CO" sz="1600" dirty="0"/>
+              <a:t> Cada deserción representa una pérdida de matrícula de </a:t>
+            </a:r>
+            <a:r>
+              <a:rPr lang="es-CO" sz="1600" b="1" dirty="0"/>
+              <a:t>$3M a $6M COP/año</a:t>
+            </a:r>
+            <a:r>
+              <a:rPr lang="es-CO" sz="1600" dirty="0"/>
+              <a:t> y pone en riesgo la acreditación de calidad ante el MEN</a:t>
+            </a:r>
+          </a:p>
+          <a:p>
+            <a:pPr>
               <a:lnSpc>
-                <a:spcPct val="107000"/>
+                <a:spcPct val="100000"/>
               </a:lnSpc>
               <a:spcAft>
                 <a:spcPts val="800"/>
               </a:spcAft>
             </a:pPr>
-            <a:r>
-              <a:rPr lang="es-ES" sz="1600" dirty="0">
-                <a:solidFill>
-                  <a:schemeClr val="bg1">
-                    <a:lumMod val="50000"/>
-                  </a:schemeClr>
-                </a:solidFill>
-                <a:latin typeface="Josefin Sans" panose="00000500000000000000" pitchFamily="2" charset="0"/>
-              </a:rPr>
-              <a:t>Explique sus segmentos mercado</a:t>
-            </a:r>
-          </a:p>
-          <a:p>
-            <a:pPr algn="just">
+            <a:br>
+              <a:rPr lang="es-CO" sz="1600" dirty="0"/>
+            </a:br>
+            <a:r>
+              <a:rPr lang="es-CO" sz="1600" dirty="0"/>
+              <a:t>• </a:t>
+            </a:r>
+            <a:r>
+              <a:rPr lang="es-CO" sz="1600" b="1" dirty="0"/>
+              <a:t>Usuarios Finales (Beneficiarios B2C):</a:t>
+            </a:r>
+            <a:br>
+              <a:rPr lang="es-CO" sz="1600" dirty="0"/>
+            </a:br>
+            <a:r>
+              <a:rPr lang="es-CO" sz="1600" dirty="0"/>
+              <a:t>    – </a:t>
+            </a:r>
+            <a:r>
+              <a:rPr lang="es-CO" sz="1600" i="1" dirty="0"/>
+              <a:t>Estudiantes activos (17 a 26 años):</a:t>
+            </a:r>
+            <a:r>
+              <a:rPr lang="es-CO" sz="1600" dirty="0"/>
+              <a:t> Reciben alertas preventivas y entrenamiento en entrevistas laborales.</a:t>
+            </a:r>
+            <a:br>
+              <a:rPr lang="es-CO" sz="1600" dirty="0"/>
+            </a:br>
+            <a:r>
+              <a:rPr lang="es-CO" sz="1600" dirty="0"/>
+              <a:t>    – </a:t>
+            </a:r>
+            <a:r>
+              <a:rPr lang="es-CO" sz="1600" i="1" dirty="0"/>
+              <a:t>Egresados:</a:t>
+            </a:r>
+            <a:r>
+              <a:rPr lang="es-CO" sz="1600" dirty="0"/>
+              <a:t> Red activa de mentoría y capital social institucional</a:t>
+            </a:r>
+          </a:p>
+          <a:p>
+            <a:pPr>
               <a:lnSpc>
-                <a:spcPct val="107000"/>
+                <a:spcPct val="100000"/>
               </a:lnSpc>
               <a:spcAft>
                 <a:spcPts val="800"/>
               </a:spcAft>
             </a:pPr>
-            <a:r>
-              <a:rPr lang="es-ES" sz="1600" dirty="0">
+            <a:br>
+              <a:rPr lang="es-CO" sz="1600" dirty="0"/>
+            </a:br>
+            <a:r>
+              <a:rPr lang="es-CO" sz="1600" dirty="0"/>
+              <a:t>• </a:t>
+            </a:r>
+            <a:r>
+              <a:rPr lang="es-CO" sz="1600" b="1" dirty="0"/>
+              <a:t>Early </a:t>
+            </a:r>
+            <a:r>
+              <a:rPr lang="es-CO" sz="1600" b="1" dirty="0" err="1"/>
+              <a:t>Adopters</a:t>
+            </a:r>
+            <a:r>
+              <a:rPr lang="es-CO" sz="1600" b="1" dirty="0"/>
+              <a:t>:</a:t>
+            </a:r>
+            <a:r>
+              <a:rPr lang="es-CO" sz="1600" dirty="0"/>
+              <a:t> 80 instituciones privadas en Bogotá y Cundinamarca con deserción crítica en los primeros 3 semestres y apertura a soluciones SaaS.</a:t>
+            </a:r>
+            <a:endParaRPr lang="es-ES" sz="1200" dirty="0">
+              <a:solidFill>
+                <a:srgbClr val="4D4D4C"/>
+              </a:solidFill>
+              <a:latin typeface="Josefin Sans" panose="00000500000000000000" pitchFamily="2" charset="0"/>
+            </a:endParaRPr>
+          </a:p>
+          <a:p>
+            <a:endParaRPr lang="es-CO" sz="1800" dirty="0">
+              <a:solidFill>
+                <a:srgbClr val="4D4D4C"/>
+              </a:solidFill>
+              <a:latin typeface="Josefin Sans" panose="00000500000000000000" pitchFamily="2" charset="0"/>
+            </a:endParaRPr>
+          </a:p>
+          <a:p>
+            <a:r>
+              <a:rPr lang="es-CO" sz="1800" dirty="0">
                 <a:solidFill>
-                  <a:schemeClr val="bg1">
-                    <a:lumMod val="50000"/>
-                  </a:schemeClr>
+                  <a:srgbClr val="4D4D4C"/>
                 </a:solidFill>
                 <a:latin typeface="Josefin Sans" panose="00000500000000000000" pitchFamily="2" charset="0"/>
               </a:rPr>
-              <a:t>Defina el Perfil del Cliente o Consumidor </a:t>
-            </a:r>
-          </a:p>
-          <a:p>
-            <a:pPr algn="just">
-              <a:lnSpc>
-                <a:spcPct val="107000"/>
-              </a:lnSpc>
-              <a:spcAft>
-                <a:spcPts val="800"/>
-              </a:spcAft>
-            </a:pPr>
-            <a:r>
-              <a:rPr lang="es-ES" sz="1600" dirty="0">
-                <a:solidFill>
-                  <a:schemeClr val="bg1">
-                    <a:lumMod val="50000"/>
-                  </a:schemeClr>
-                </a:solidFill>
-                <a:latin typeface="Josefin Sans" panose="00000500000000000000" pitchFamily="2" charset="0"/>
-              </a:rPr>
-              <a:t>(Tiempo sugerido: 1 minuto)</a:t>
+              <a:t> </a:t>
             </a:r>
           </a:p>
           <a:p>
@@ -9676,41 +10175,6 @@
             </a:endParaRPr>
           </a:p>
           <a:p>
-            <a:endParaRPr lang="es-CO" sz="1800" dirty="0">
-              <a:solidFill>
-                <a:srgbClr val="4D4D4C"/>
-              </a:solidFill>
-              <a:latin typeface="Josefin Sans" panose="00000500000000000000" pitchFamily="2" charset="0"/>
-            </a:endParaRPr>
-          </a:p>
-          <a:p>
-            <a:r>
-              <a:rPr lang="es-CO" sz="1800" dirty="0">
-                <a:solidFill>
-                  <a:srgbClr val="4D4D4C"/>
-                </a:solidFill>
-                <a:latin typeface="Josefin Sans" panose="00000500000000000000" pitchFamily="2" charset="0"/>
-              </a:rPr>
-              <a:t> </a:t>
-            </a:r>
-          </a:p>
-          <a:p>
-            <a:pPr algn="just">
-              <a:lnSpc>
-                <a:spcPct val="107000"/>
-              </a:lnSpc>
-              <a:spcAft>
-                <a:spcPts val="800"/>
-              </a:spcAft>
-            </a:pPr>
-            <a:endParaRPr lang="es-ES" sz="1200" dirty="0">
-              <a:solidFill>
-                <a:srgbClr val="4D4D4C"/>
-              </a:solidFill>
-              <a:latin typeface="Josefin Sans" panose="00000500000000000000" pitchFamily="2" charset="0"/>
-            </a:endParaRPr>
-          </a:p>
-          <a:p>
             <a:endParaRPr lang="es-CO" sz="1600" dirty="0">
               <a:solidFill>
                 <a:srgbClr val="4D4D4C"/>
@@ -9775,7 +10239,7 @@
         </p:blipFill>
         <p:spPr bwMode="auto">
           <a:xfrm>
-            <a:off x="5738071" y="1649398"/>
+            <a:off x="6096000" y="1891994"/>
             <a:ext cx="5184396" cy="3351981"/>
           </a:xfrm>
           <a:prstGeom prst="rect">
@@ -9944,7 +10408,7 @@
         </p:nvSpPr>
         <p:spPr>
           <a:xfrm>
-            <a:off x="983609" y="673681"/>
+            <a:off x="576229" y="296848"/>
             <a:ext cx="6094602" cy="800219"/>
           </a:xfrm>
           <a:prstGeom prst="rect">
@@ -10000,8 +10464,8 @@
         </p:nvSpPr>
         <p:spPr>
           <a:xfrm>
-            <a:off x="622883" y="2151357"/>
-            <a:ext cx="6094602" cy="2156809"/>
+            <a:off x="482922" y="1315309"/>
+            <a:ext cx="6533698" cy="4801314"/>
           </a:xfrm>
           <a:prstGeom prst="rect">
             <a:avLst/>
@@ -10014,88 +10478,122 @@
           </a:bodyPr>
           <a:lstStyle/>
           <a:p>
-            <a:pPr algn="just">
-              <a:lnSpc>
-                <a:spcPct val="107000"/>
-              </a:lnSpc>
-              <a:spcAft>
-                <a:spcPts val="800"/>
-              </a:spcAft>
-            </a:pPr>
-            <a:r>
-              <a:rPr lang="es-ES" sz="1800" dirty="0">
-                <a:solidFill>
-                  <a:schemeClr val="bg1">
-                    <a:lumMod val="50000"/>
-                  </a:schemeClr>
-                </a:solidFill>
-                <a:latin typeface="Josefin Sans" panose="00000500000000000000" pitchFamily="2" charset="0"/>
-              </a:rPr>
-              <a:t>Explicar la solución materializada del producto o servicio, mostrando cómo responde a la problemática o necesidad identificada</a:t>
-            </a:r>
-          </a:p>
-          <a:p>
-            <a:pPr algn="just">
-              <a:lnSpc>
-                <a:spcPct val="107000"/>
-              </a:lnSpc>
-              <a:spcAft>
-                <a:spcPts val="800"/>
-              </a:spcAft>
-            </a:pPr>
-            <a:r>
-              <a:rPr lang="es-ES" sz="1800" dirty="0">
-                <a:solidFill>
-                  <a:schemeClr val="bg1">
-                    <a:lumMod val="50000"/>
-                  </a:schemeClr>
-                </a:solidFill>
-                <a:latin typeface="Josefin Sans" panose="00000500000000000000" pitchFamily="2" charset="0"/>
-              </a:rPr>
-              <a:t>Explique el factor innovador o diferenciador</a:t>
-            </a:r>
-          </a:p>
-          <a:p>
-            <a:pPr algn="just">
-              <a:lnSpc>
-                <a:spcPct val="107000"/>
-              </a:lnSpc>
-              <a:spcAft>
-                <a:spcPts val="800"/>
-              </a:spcAft>
-            </a:pPr>
-            <a:r>
-              <a:rPr lang="es-ES" sz="1800" dirty="0">
-                <a:solidFill>
-                  <a:schemeClr val="bg1">
-                    <a:lumMod val="50000"/>
-                  </a:schemeClr>
-                </a:solidFill>
-                <a:latin typeface="Josefin Sans" panose="00000500000000000000" pitchFamily="2" charset="0"/>
-              </a:rPr>
-              <a:t>¿Por qué me voy a enamorar de tu producto o servicio?</a:t>
-            </a:r>
-          </a:p>
-          <a:p>
-            <a:pPr algn="just">
-              <a:lnSpc>
-                <a:spcPct val="107000"/>
-              </a:lnSpc>
-              <a:spcAft>
-                <a:spcPts val="800"/>
-              </a:spcAft>
-            </a:pPr>
-            <a:r>
-              <a:rPr lang="es-ES" sz="1800" dirty="0">
-                <a:solidFill>
-                  <a:schemeClr val="bg1">
-                    <a:lumMod val="50000"/>
-                  </a:schemeClr>
-                </a:solidFill>
-                <a:latin typeface="Josefin Sans" panose="00000500000000000000" pitchFamily="2" charset="0"/>
-              </a:rPr>
-              <a:t>(Tiempo sugerido: 1 minuto)</a:t>
-            </a:r>
+            <a:r>
+              <a:rPr lang="es-CO" b="1" dirty="0"/>
+              <a:t>"Detecta. Prepara. Conecta." — La Solución Integral de </a:t>
+            </a:r>
+            <a:r>
+              <a:rPr lang="es-CO" b="1" dirty="0" err="1"/>
+              <a:t>TalentLab</a:t>
+            </a:r>
+            <a:r>
+              <a:rPr lang="es-CO" b="1" dirty="0"/>
+              <a:t>”</a:t>
+            </a:r>
+          </a:p>
+          <a:p>
+            <a:endParaRPr lang="es-CO" b="1" dirty="0"/>
+          </a:p>
+          <a:p>
+            <a:r>
+              <a:rPr lang="es-CO" dirty="0"/>
+              <a:t>• </a:t>
+            </a:r>
+            <a:r>
+              <a:rPr lang="es-CO" b="1" dirty="0"/>
+              <a:t>Semáforo Predictivo:</a:t>
+            </a:r>
+            <a:r>
+              <a:rPr lang="es-CO" dirty="0"/>
+              <a:t> Machine </a:t>
+            </a:r>
+            <a:r>
+              <a:rPr lang="es-CO" dirty="0" err="1"/>
+              <a:t>Learning</a:t>
+            </a:r>
+            <a:r>
+              <a:rPr lang="es-CO" dirty="0"/>
+              <a:t> para alertar riesgo de deserción antes del abandono</a:t>
+            </a:r>
+          </a:p>
+          <a:p>
+            <a:br>
+              <a:rPr lang="es-CO" dirty="0"/>
+            </a:br>
+            <a:r>
+              <a:rPr lang="es-CO" dirty="0"/>
+              <a:t>• </a:t>
+            </a:r>
+            <a:r>
+              <a:rPr lang="es-CO" b="1" dirty="0"/>
+              <a:t>Simulador con IA:</a:t>
+            </a:r>
+            <a:r>
+              <a:rPr lang="es-CO" dirty="0"/>
+              <a:t> Entrenamiento de entrevistas técnicas y habilidades blandas con </a:t>
+            </a:r>
+            <a:r>
+              <a:rPr lang="es-CO" dirty="0" err="1"/>
+              <a:t>feedback</a:t>
+            </a:r>
+            <a:r>
+              <a:rPr lang="es-CO" dirty="0"/>
+              <a:t> instantáneo</a:t>
+            </a:r>
+          </a:p>
+          <a:p>
+            <a:br>
+              <a:rPr lang="es-CO" dirty="0"/>
+            </a:br>
+            <a:r>
+              <a:rPr lang="es-CO" dirty="0"/>
+              <a:t>• </a:t>
+            </a:r>
+            <a:r>
+              <a:rPr lang="es-CO" b="1" dirty="0"/>
+              <a:t>Red de Mentorías:</a:t>
+            </a:r>
+            <a:r>
+              <a:rPr lang="es-CO" dirty="0"/>
+              <a:t> Conexión algorítmica entre estudiantes activos y egresados afines</a:t>
+            </a:r>
+          </a:p>
+          <a:p>
+            <a:br>
+              <a:rPr lang="es-CO" dirty="0"/>
+            </a:br>
+            <a:r>
+              <a:rPr lang="es-CO" dirty="0"/>
+              <a:t>• </a:t>
+            </a:r>
+            <a:r>
+              <a:rPr lang="es-CO" b="1" dirty="0"/>
+              <a:t>Diferenciador Clave:</a:t>
+            </a:r>
+            <a:r>
+              <a:rPr lang="es-CO" dirty="0"/>
+              <a:t> Solución 3 en 1, adaptada a Colombia y de ultra bajo costo en la nube (&lt;$0.05 USD/alumno)</a:t>
+            </a:r>
+          </a:p>
+          <a:p>
+            <a:br>
+              <a:rPr lang="es-CO" dirty="0"/>
+            </a:br>
+            <a:r>
+              <a:rPr lang="es-CO" dirty="0"/>
+              <a:t>• </a:t>
+            </a:r>
+            <a:r>
+              <a:rPr lang="es-CO" b="1" dirty="0"/>
+              <a:t>El Factor que Enamora:</a:t>
+            </a:r>
+            <a:r>
+              <a:rPr lang="es-CO" dirty="0"/>
+              <a:t> Salva matrículas a tiempo y prepara al estudiante para su primer empleo.</a:t>
+            </a:r>
+          </a:p>
+          <a:p>
+            <a:endParaRPr lang="es-CO" b="1" dirty="0"/>
           </a:p>
         </p:txBody>
       </p:sp>
@@ -10293,8 +10791,8 @@
         </p:nvSpPr>
         <p:spPr>
           <a:xfrm>
-            <a:off x="921866" y="1427032"/>
-            <a:ext cx="4471039" cy="5399555"/>
+            <a:off x="579744" y="1492347"/>
+            <a:ext cx="5516256" cy="4493538"/>
           </a:xfrm>
           <a:prstGeom prst="rect">
             <a:avLst/>
@@ -10307,145 +10805,135 @@
           </a:bodyPr>
           <a:lstStyle/>
           <a:p>
-            <a:pPr algn="just">
-              <a:lnSpc>
-                <a:spcPct val="107000"/>
-              </a:lnSpc>
-              <a:spcAft>
-                <a:spcPts val="800"/>
-              </a:spcAft>
-            </a:pPr>
-            <a:r>
-              <a:rPr lang="es-ES" dirty="0">
-                <a:solidFill>
-                  <a:schemeClr val="bg1">
-                    <a:lumMod val="50000"/>
-                  </a:schemeClr>
-                </a:solidFill>
-                <a:latin typeface="Josefin Sans" panose="00000500000000000000" pitchFamily="2" charset="0"/>
-              </a:rPr>
-              <a:t>Focaliza la atención en la oportunidad del negocio. </a:t>
-            </a:r>
-          </a:p>
-          <a:p>
-            <a:pPr algn="just">
-              <a:lnSpc>
-                <a:spcPct val="107000"/>
-              </a:lnSpc>
-              <a:spcAft>
-                <a:spcPts val="800"/>
-              </a:spcAft>
-            </a:pPr>
-            <a:r>
-              <a:rPr lang="es-ES" dirty="0">
-                <a:solidFill>
-                  <a:srgbClr val="00B050"/>
-                </a:solidFill>
-                <a:latin typeface="Josefin Sans" panose="00000500000000000000" pitchFamily="2" charset="0"/>
-              </a:rPr>
-              <a:t>Utiliza cifras confiables de lo general a lo particular </a:t>
-            </a:r>
-            <a:r>
-              <a:rPr lang="es-ES" dirty="0">
-                <a:solidFill>
-                  <a:schemeClr val="bg1">
-                    <a:lumMod val="50000"/>
-                  </a:schemeClr>
-                </a:solidFill>
-                <a:latin typeface="Josefin Sans" panose="00000500000000000000" pitchFamily="2" charset="0"/>
-              </a:rPr>
-              <a:t>que te permitan demostrar la validez de tu idea de negocio en el mercado actual.</a:t>
-            </a:r>
-          </a:p>
-          <a:p>
-            <a:pPr algn="just">
-              <a:lnSpc>
-                <a:spcPct val="107000"/>
-              </a:lnSpc>
-              <a:spcAft>
-                <a:spcPts val="800"/>
-              </a:spcAft>
-            </a:pPr>
-            <a:r>
-              <a:rPr lang="es-ES" dirty="0">
-                <a:solidFill>
-                  <a:schemeClr val="bg1">
-                    <a:lumMod val="50000"/>
-                  </a:schemeClr>
-                </a:solidFill>
-                <a:latin typeface="Josefin Sans" panose="00000500000000000000" pitchFamily="2" charset="0"/>
-              </a:rPr>
-              <a:t>Ten en cuenta:</a:t>
-            </a:r>
-          </a:p>
-          <a:p>
-            <a:pPr algn="just">
-              <a:lnSpc>
-                <a:spcPct val="107000"/>
-              </a:lnSpc>
-              <a:spcAft>
-                <a:spcPts val="800"/>
-              </a:spcAft>
-            </a:pPr>
-            <a:r>
-              <a:rPr lang="es-ES" dirty="0">
-                <a:solidFill>
-                  <a:schemeClr val="bg1">
-                    <a:lumMod val="50000"/>
-                  </a:schemeClr>
-                </a:solidFill>
-                <a:latin typeface="Josefin Sans" panose="00000500000000000000" pitchFamily="2" charset="0"/>
-              </a:rPr>
-              <a:t>Tendencias de crecimiento y oportunidad del sector económico al que pertenece la idea</a:t>
-            </a:r>
-          </a:p>
-          <a:p>
-            <a:pPr algn="just">
-              <a:lnSpc>
-                <a:spcPct val="107000"/>
-              </a:lnSpc>
-              <a:spcAft>
-                <a:spcPts val="800"/>
-              </a:spcAft>
-            </a:pPr>
-            <a:r>
-              <a:rPr lang="es-ES" dirty="0">
-                <a:solidFill>
-                  <a:schemeClr val="bg1">
-                    <a:lumMod val="50000"/>
-                  </a:schemeClr>
-                </a:solidFill>
-                <a:latin typeface="Josefin Sans" panose="00000500000000000000" pitchFamily="2" charset="0"/>
-              </a:rPr>
-              <a:t>Cifras relacionadas con la cantidad de posibles clientes a los que puedes llegar con tu producto y/o servicio (Mercado Potencial)</a:t>
-            </a:r>
-          </a:p>
-          <a:p>
-            <a:pPr algn="just">
-              <a:lnSpc>
-                <a:spcPct val="107000"/>
-              </a:lnSpc>
-              <a:spcAft>
-                <a:spcPts val="800"/>
-              </a:spcAft>
-            </a:pPr>
-            <a:r>
-              <a:rPr lang="es-ES" dirty="0">
-                <a:solidFill>
-                  <a:schemeClr val="bg1">
-                    <a:lumMod val="50000"/>
-                  </a:schemeClr>
-                </a:solidFill>
-                <a:latin typeface="Josefin Sans" panose="00000500000000000000" pitchFamily="2" charset="0"/>
-              </a:rPr>
-              <a:t>(Tiempo sugerido: 1 minuto)</a:t>
-            </a:r>
-            <a:endParaRPr lang="es-CO" sz="1800" dirty="0">
-              <a:solidFill>
-                <a:srgbClr val="4D4D4C"/>
-              </a:solidFill>
-              <a:latin typeface="Josefin Sans" panose="00000500000000000000" pitchFamily="2" charset="0"/>
-            </a:endParaRPr>
+            <a:r>
+              <a:rPr lang="es-CO" b="1" dirty="0"/>
+              <a:t>Oportunidad de Mercado: De lo General a lo Particular</a:t>
+            </a:r>
+          </a:p>
+          <a:p>
+            <a:endParaRPr lang="es-CO" dirty="0"/>
+          </a:p>
+          <a:p>
+            <a:r>
+              <a:rPr lang="es-CO" dirty="0"/>
+              <a:t>• </a:t>
+            </a:r>
+            <a:r>
+              <a:rPr lang="es-CO" b="1" dirty="0"/>
+              <a:t>Sector </a:t>
+            </a:r>
+            <a:r>
+              <a:rPr lang="es-CO" b="1" dirty="0" err="1"/>
+              <a:t>EdTech</a:t>
+            </a:r>
+            <a:r>
+              <a:rPr lang="es-CO" b="1" dirty="0"/>
+              <a:t> en Crecimiento:</a:t>
+            </a:r>
+            <a:r>
+              <a:rPr lang="es-CO" dirty="0"/>
+              <a:t> Crecimiento anual sostenido del </a:t>
+            </a:r>
+            <a:r>
+              <a:rPr lang="es-CO" b="1" dirty="0"/>
+              <a:t>15.2% (CAGR)</a:t>
+            </a:r>
+            <a:r>
+              <a:rPr lang="es-CO" dirty="0"/>
+              <a:t> en Latinoamérica impulsado por analítica e IA.</a:t>
+            </a:r>
+            <a:br>
+              <a:rPr lang="es-CO" dirty="0"/>
+            </a:br>
+            <a:r>
+              <a:rPr lang="es-CO" dirty="0"/>
+              <a:t>• </a:t>
+            </a:r>
+            <a:r>
+              <a:rPr lang="es-CO" b="1" dirty="0"/>
+              <a:t>TAM (Mercado Total):</a:t>
+            </a:r>
+            <a:r>
+              <a:rPr lang="es-CO" dirty="0"/>
+              <a:t> +300 instituciones de educación técnica y superior en Colombia (~$2.500M COP/año).</a:t>
+            </a:r>
+            <a:br>
+              <a:rPr lang="es-CO" dirty="0"/>
+            </a:br>
+            <a:r>
+              <a:rPr lang="es-CO" dirty="0"/>
+              <a:t>• </a:t>
+            </a:r>
+            <a:r>
+              <a:rPr lang="es-CO" b="1" dirty="0"/>
+              <a:t>SAM (Mercado Disponible):</a:t>
+            </a:r>
+            <a:r>
+              <a:rPr lang="es-CO" dirty="0"/>
+              <a:t> 180 instituciones técnicas y tecnológicas del segmento privado intermedio.</a:t>
+            </a:r>
+            <a:br>
+              <a:rPr lang="es-CO" dirty="0"/>
+            </a:br>
+            <a:r>
+              <a:rPr lang="es-CO" dirty="0"/>
+              <a:t>• </a:t>
+            </a:r>
+            <a:r>
+              <a:rPr lang="es-CO" b="1" dirty="0"/>
+              <a:t>SOM (Mercado Objetivo 5 Años):</a:t>
+            </a:r>
+            <a:r>
+              <a:rPr lang="es-CO" dirty="0"/>
+              <a:t> </a:t>
+            </a:r>
+            <a:r>
+              <a:rPr lang="es-CO" b="1" dirty="0"/>
+              <a:t>80 instituciones foco</a:t>
+            </a:r>
+            <a:r>
+              <a:rPr lang="es-CO" dirty="0"/>
+              <a:t> en Bogotá y Región Andina (Meta: </a:t>
+            </a:r>
+            <a:r>
+              <a:rPr lang="es-CO" b="1" dirty="0"/>
+              <a:t>68 licencias activas al Año 5</a:t>
+            </a:r>
+            <a:r>
+              <a:rPr lang="es-CO" dirty="0"/>
+              <a:t>).</a:t>
+            </a:r>
+            <a:br>
+              <a:rPr lang="es-CO" dirty="0"/>
+            </a:br>
+            <a:r>
+              <a:rPr lang="es-CO" dirty="0"/>
+              <a:t>• </a:t>
+            </a:r>
+            <a:r>
+              <a:rPr lang="es-CO" b="1" dirty="0"/>
+              <a:t>Validación Real de Campo:</a:t>
+            </a:r>
+            <a:r>
+              <a:rPr lang="es-CO" dirty="0"/>
+              <a:t> Encuesta a 100 actores clave: </a:t>
+            </a:r>
+            <a:r>
+              <a:rPr lang="es-CO" b="1" dirty="0"/>
+              <a:t>86%</a:t>
+            </a:r>
+            <a:r>
+              <a:rPr lang="es-CO" dirty="0"/>
+              <a:t> demanda simulador con IA y </a:t>
+            </a:r>
+            <a:r>
+              <a:rPr lang="es-CO" b="1" dirty="0"/>
+              <a:t>78%</a:t>
+            </a:r>
+            <a:r>
+              <a:rPr lang="es-CO" dirty="0"/>
+              <a:t> de directivos pagaría por el sistema de alertas tempranas.</a:t>
+            </a:r>
           </a:p>
           <a:p>
             <a:r>
@@ -10615,8 +11103,8 @@
         </p:nvSpPr>
         <p:spPr>
           <a:xfrm>
-            <a:off x="908108" y="1549213"/>
-            <a:ext cx="6094602" cy="4048994"/>
+            <a:off x="405599" y="1329676"/>
+            <a:ext cx="6527046" cy="4555093"/>
           </a:xfrm>
           <a:prstGeom prst="rect">
             <a:avLst/>
@@ -10629,170 +11117,107 @@
           </a:bodyPr>
           <a:lstStyle/>
           <a:p>
-            <a:pPr algn="just">
-              <a:lnSpc>
-                <a:spcPct val="107000"/>
-              </a:lnSpc>
-              <a:spcAft>
-                <a:spcPts val="800"/>
-              </a:spcAft>
-            </a:pPr>
-            <a:r>
-              <a:rPr lang="es-ES" sz="1800" dirty="0">
-                <a:solidFill>
-                  <a:schemeClr val="bg1">
-                    <a:lumMod val="50000"/>
-                  </a:schemeClr>
-                </a:solidFill>
-                <a:latin typeface="Josefin Sans" panose="00000500000000000000" pitchFamily="2" charset="0"/>
-              </a:rPr>
-              <a:t>Presenta los momentos claves o el trayecto recorrido de tu modelo de negocio.</a:t>
-            </a:r>
-          </a:p>
-          <a:p>
-            <a:pPr algn="just">
-              <a:lnSpc>
-                <a:spcPct val="107000"/>
-              </a:lnSpc>
-              <a:spcAft>
-                <a:spcPts val="800"/>
-              </a:spcAft>
-            </a:pPr>
-            <a:r>
-              <a:rPr lang="es-ES" sz="1800" dirty="0">
-                <a:solidFill>
-                  <a:schemeClr val="bg1">
-                    <a:lumMod val="50000"/>
-                  </a:schemeClr>
-                </a:solidFill>
-                <a:latin typeface="Josefin Sans" panose="00000500000000000000" pitchFamily="2" charset="0"/>
-              </a:rPr>
-              <a:t>¿Qué se ha hecho hasta el momento?</a:t>
-            </a:r>
-          </a:p>
-          <a:p>
-            <a:pPr algn="just">
-              <a:lnSpc>
-                <a:spcPct val="107000"/>
-              </a:lnSpc>
-              <a:spcAft>
-                <a:spcPts val="800"/>
-              </a:spcAft>
-            </a:pPr>
-            <a:r>
-              <a:rPr lang="es-ES" sz="1800" dirty="0">
-                <a:solidFill>
-                  <a:schemeClr val="bg1">
-                    <a:lumMod val="50000"/>
-                  </a:schemeClr>
-                </a:solidFill>
-                <a:latin typeface="Josefin Sans" panose="00000500000000000000" pitchFamily="2" charset="0"/>
-              </a:rPr>
-              <a:t>Presente los resultados de la validación</a:t>
-            </a:r>
-          </a:p>
-          <a:p>
-            <a:pPr algn="just">
-              <a:lnSpc>
-                <a:spcPct val="107000"/>
-              </a:lnSpc>
-              <a:spcAft>
-                <a:spcPts val="800"/>
-              </a:spcAft>
-            </a:pPr>
-            <a:r>
-              <a:rPr lang="es-ES" sz="1800" dirty="0">
-                <a:solidFill>
-                  <a:schemeClr val="bg1">
-                    <a:lumMod val="50000"/>
-                  </a:schemeClr>
-                </a:solidFill>
-                <a:latin typeface="Josefin Sans" panose="00000500000000000000" pitchFamily="2" charset="0"/>
-              </a:rPr>
-              <a:t>¿Cuál ha sido tu experiencia previa con este modelo de negocio propuesto?</a:t>
-            </a:r>
-          </a:p>
-          <a:p>
-            <a:pPr algn="just">
-              <a:lnSpc>
-                <a:spcPct val="107000"/>
-              </a:lnSpc>
-              <a:spcAft>
-                <a:spcPts val="800"/>
-              </a:spcAft>
-            </a:pPr>
-            <a:r>
-              <a:rPr lang="es-ES" sz="1800" dirty="0">
-                <a:solidFill>
-                  <a:schemeClr val="bg1">
-                    <a:lumMod val="50000"/>
-                  </a:schemeClr>
-                </a:solidFill>
-                <a:latin typeface="Josefin Sans" panose="00000500000000000000" pitchFamily="2" charset="0"/>
-              </a:rPr>
-              <a:t>¿Cuál es el estado actual del modelo de negocio?</a:t>
-            </a:r>
-          </a:p>
-          <a:p>
-            <a:pPr algn="just">
-              <a:lnSpc>
-                <a:spcPct val="107000"/>
-              </a:lnSpc>
-              <a:spcAft>
-                <a:spcPts val="800"/>
-              </a:spcAft>
-            </a:pPr>
-            <a:r>
-              <a:rPr lang="es-ES" sz="1800" dirty="0">
-                <a:solidFill>
-                  <a:schemeClr val="bg1">
-                    <a:lumMod val="50000"/>
-                  </a:schemeClr>
-                </a:solidFill>
-                <a:latin typeface="Josefin Sans" panose="00000500000000000000" pitchFamily="2" charset="0"/>
-              </a:rPr>
-              <a:t>¿Está realizando ventas de su modelo de negocios?</a:t>
-            </a:r>
-          </a:p>
-          <a:p>
-            <a:pPr algn="just">
-              <a:lnSpc>
-                <a:spcPct val="107000"/>
-              </a:lnSpc>
-              <a:spcAft>
-                <a:spcPts val="800"/>
-              </a:spcAft>
-            </a:pPr>
-            <a:r>
-              <a:rPr lang="es-ES" sz="1800" dirty="0">
-                <a:solidFill>
-                  <a:srgbClr val="00B050"/>
-                </a:solidFill>
-                <a:latin typeface="Josefin Sans" panose="00000500000000000000" pitchFamily="2" charset="0"/>
-              </a:rPr>
-              <a:t>Puedes usar historias o testimonios de los clientes actuales.</a:t>
-            </a:r>
-          </a:p>
-          <a:p>
-            <a:pPr algn="just">
-              <a:lnSpc>
-                <a:spcPct val="107000"/>
-              </a:lnSpc>
-              <a:spcAft>
-                <a:spcPts val="800"/>
-              </a:spcAft>
-            </a:pPr>
-            <a:r>
-              <a:rPr lang="es-ES" sz="1800" dirty="0">
-                <a:solidFill>
-                  <a:schemeClr val="bg1">
-                    <a:lumMod val="50000"/>
-                  </a:schemeClr>
-                </a:solidFill>
-                <a:latin typeface="Josefin Sans" panose="00000500000000000000" pitchFamily="2" charset="0"/>
-              </a:rPr>
-              <a:t>(Tiempo sugerido: 2 minutos)</a:t>
-            </a:r>
+            <a:endParaRPr lang="es-CO" sz="1600" dirty="0"/>
+          </a:p>
+          <a:p>
+            <a:r>
+              <a:rPr lang="es-CO" sz="1600" b="1" dirty="0"/>
+              <a:t>Trayecto Recorrido y Estado Actual del Proyecto</a:t>
+            </a:r>
+          </a:p>
+          <a:p>
+            <a:endParaRPr lang="es-CO" sz="1600" dirty="0"/>
+          </a:p>
+          <a:p>
+            <a:r>
+              <a:rPr lang="es-CO" sz="1600" dirty="0"/>
+              <a:t>• </a:t>
+            </a:r>
+            <a:r>
+              <a:rPr lang="es-CO" sz="1600" b="1" dirty="0"/>
+              <a:t>Validación con el Sector:</a:t>
+            </a:r>
+            <a:r>
+              <a:rPr lang="es-CO" sz="1600" dirty="0"/>
+              <a:t> Estudio de mercado con 100 directivos, docentes y estudiantes confirmando la necesidad urgente de alertas tempranas</a:t>
+            </a:r>
+          </a:p>
+          <a:p>
+            <a:br>
+              <a:rPr lang="es-CO" sz="1600" dirty="0"/>
+            </a:br>
+            <a:r>
+              <a:rPr lang="es-CO" sz="1600" dirty="0"/>
+              <a:t>• </a:t>
+            </a:r>
+            <a:r>
+              <a:rPr lang="es-CO" sz="1600" b="1" dirty="0"/>
+              <a:t>Construcción Constante de la Plataforma:</a:t>
+            </a:r>
+            <a:r>
+              <a:rPr lang="es-CO" sz="1600" dirty="0"/>
+              <a:t> Desarrollo y pruebas continuas del prototipo funcional: panel de control para directivos, simulador interactivo para estudiantes y base de datos segura</a:t>
+            </a:r>
+          </a:p>
+          <a:p>
+            <a:br>
+              <a:rPr lang="es-CO" sz="1600" dirty="0"/>
+            </a:br>
+            <a:r>
+              <a:rPr lang="es-CO" sz="1600" dirty="0"/>
+              <a:t>• </a:t>
+            </a:r>
+            <a:r>
+              <a:rPr lang="es-CO" sz="1600" b="1" dirty="0"/>
+              <a:t>Pruebas del Sistema Inteligente:</a:t>
+            </a:r>
+            <a:r>
+              <a:rPr lang="es-CO" sz="1600" dirty="0"/>
+              <a:t> Calibración del semáforo preventivo de deserción y del evaluador automático de entrevistas laborales en español.</a:t>
+            </a:r>
+            <a:br>
+              <a:rPr lang="es-CO" sz="1600" dirty="0"/>
+            </a:br>
+            <a:r>
+              <a:rPr lang="es-CO" sz="1600" dirty="0"/>
+              <a:t>• </a:t>
+            </a:r>
+            <a:r>
+              <a:rPr lang="es-CO" sz="1600" b="1" dirty="0"/>
+              <a:t>Estructuración Empresarial:</a:t>
+            </a:r>
+            <a:r>
+              <a:rPr lang="es-CO" sz="1600" dirty="0"/>
+              <a:t> Modelo financiero a 5 años, presupuesto de inversión ($47.3M) y constitución legal proyectada como S.A.S</a:t>
+            </a:r>
+          </a:p>
+          <a:p>
+            <a:br>
+              <a:rPr lang="es-CO" sz="1600" dirty="0"/>
+            </a:br>
+            <a:r>
+              <a:rPr lang="es-CO" sz="1600" dirty="0"/>
+              <a:t>• </a:t>
+            </a:r>
+            <a:r>
+              <a:rPr lang="es-CO" sz="1600" b="1" dirty="0"/>
+              <a:t>Estado Actual:</a:t>
+            </a:r>
+            <a:r>
+              <a:rPr lang="es-CO" sz="1600" dirty="0"/>
+              <a:t> </a:t>
+            </a:r>
+            <a:r>
+              <a:rPr lang="es-CO" sz="1600" b="1" dirty="0"/>
+              <a:t>Prototipo 100% operativo y probado</a:t>
+            </a:r>
+            <a:r>
+              <a:rPr lang="es-CO" sz="1600" dirty="0"/>
+              <a:t>, listo para iniciar pruebas piloto en instituciones educativas antes de la venta masiva.</a:t>
+            </a:r>
+          </a:p>
+          <a:p>
+            <a:endParaRPr lang="es-CO" dirty="0"/>
           </a:p>
         </p:txBody>
       </p:sp>
@@ -11001,8 +11426,8 @@
         </p:nvSpPr>
         <p:spPr>
           <a:xfrm>
-            <a:off x="1067856" y="1242501"/>
-            <a:ext cx="4262312" cy="5023426"/>
+            <a:off x="485191" y="1242501"/>
+            <a:ext cx="5477069" cy="5219634"/>
           </a:xfrm>
           <a:prstGeom prst="rect">
             <a:avLst/>
@@ -11015,7 +11440,7 @@
           </a:bodyPr>
           <a:lstStyle/>
           <a:p>
-            <a:pPr algn="just">
+            <a:pPr>
               <a:lnSpc>
                 <a:spcPct val="107000"/>
               </a:lnSpc>
@@ -11031,153 +11456,14 @@
             </a:endParaRPr>
           </a:p>
           <a:p>
-            <a:pPr algn="just">
-              <a:lnSpc>
-                <a:spcPct val="107000"/>
-              </a:lnSpc>
-              <a:spcAft>
-                <a:spcPts val="800"/>
-              </a:spcAft>
-            </a:pPr>
-            <a:r>
-              <a:rPr lang="es-ES" sz="1800" dirty="0">
-                <a:solidFill>
-                  <a:schemeClr val="bg1">
-                    <a:lumMod val="50000"/>
-                  </a:schemeClr>
-                </a:solidFill>
-                <a:latin typeface="Josefin Sans" panose="00000500000000000000" pitchFamily="2" charset="0"/>
-              </a:rPr>
-              <a:t>Presente el análisis realizado a la competencia, </a:t>
-            </a:r>
-            <a:r>
-              <a:rPr lang="es-ES" sz="1800" dirty="0">
-                <a:solidFill>
-                  <a:srgbClr val="00B050"/>
-                </a:solidFill>
-                <a:latin typeface="Josefin Sans" panose="00000500000000000000" pitchFamily="2" charset="0"/>
-              </a:rPr>
-              <a:t>definiendo al menos 5 factores de comparación </a:t>
-            </a:r>
-            <a:r>
-              <a:rPr lang="es-ES" sz="1800" dirty="0">
-                <a:solidFill>
-                  <a:schemeClr val="bg1">
-                    <a:lumMod val="50000"/>
-                  </a:schemeClr>
-                </a:solidFill>
-                <a:latin typeface="Josefin Sans" panose="00000500000000000000" pitchFamily="2" charset="0"/>
-              </a:rPr>
-              <a:t>permitiendo ver ventajas y desventajas con relación a su Modelo de Negocio.</a:t>
-            </a:r>
-          </a:p>
-          <a:p>
-            <a:pPr algn="just">
-              <a:lnSpc>
-                <a:spcPct val="107000"/>
-              </a:lnSpc>
-              <a:spcAft>
-                <a:spcPts val="800"/>
-              </a:spcAft>
-            </a:pPr>
-            <a:r>
-              <a:rPr lang="es-ES" sz="1800" dirty="0">
-                <a:solidFill>
-                  <a:schemeClr val="bg1">
-                    <a:lumMod val="50000"/>
-                  </a:schemeClr>
-                </a:solidFill>
-                <a:latin typeface="Josefin Sans" panose="00000500000000000000" pitchFamily="2" charset="0"/>
-              </a:rPr>
-              <a:t>*Fortalezas</a:t>
-            </a:r>
-          </a:p>
-          <a:p>
-            <a:pPr algn="just">
-              <a:lnSpc>
-                <a:spcPct val="107000"/>
-              </a:lnSpc>
-              <a:spcAft>
-                <a:spcPts val="800"/>
-              </a:spcAft>
-            </a:pPr>
-            <a:r>
-              <a:rPr lang="es-ES" sz="1800" dirty="0">
-                <a:solidFill>
-                  <a:schemeClr val="bg1">
-                    <a:lumMod val="50000"/>
-                  </a:schemeClr>
-                </a:solidFill>
-                <a:latin typeface="Josefin Sans" panose="00000500000000000000" pitchFamily="2" charset="0"/>
-              </a:rPr>
-              <a:t>*Ubicación geográfica</a:t>
-            </a:r>
-          </a:p>
-          <a:p>
-            <a:pPr algn="just">
-              <a:lnSpc>
-                <a:spcPct val="107000"/>
-              </a:lnSpc>
-              <a:spcAft>
-                <a:spcPts val="800"/>
-              </a:spcAft>
-            </a:pPr>
-            <a:r>
-              <a:rPr lang="es-ES" sz="1800" dirty="0">
-                <a:solidFill>
-                  <a:schemeClr val="bg1">
-                    <a:lumMod val="50000"/>
-                  </a:schemeClr>
-                </a:solidFill>
-                <a:latin typeface="Josefin Sans" panose="00000500000000000000" pitchFamily="2" charset="0"/>
-              </a:rPr>
-              <a:t>*Estrategia de precios</a:t>
-            </a:r>
-          </a:p>
-          <a:p>
-            <a:pPr algn="just">
-              <a:lnSpc>
-                <a:spcPct val="107000"/>
-              </a:lnSpc>
-              <a:spcAft>
-                <a:spcPts val="800"/>
-              </a:spcAft>
-            </a:pPr>
-            <a:r>
-              <a:rPr lang="es-ES" sz="1800" dirty="0">
-                <a:solidFill>
-                  <a:schemeClr val="bg1">
-                    <a:lumMod val="50000"/>
-                  </a:schemeClr>
-                </a:solidFill>
-                <a:latin typeface="Josefin Sans" panose="00000500000000000000" pitchFamily="2" charset="0"/>
-              </a:rPr>
-              <a:t>*Segmentación de mercado</a:t>
-            </a:r>
-          </a:p>
-          <a:p>
-            <a:pPr algn="just">
-              <a:lnSpc>
-                <a:spcPct val="107000"/>
-              </a:lnSpc>
-              <a:spcAft>
-                <a:spcPts val="800"/>
-              </a:spcAft>
-            </a:pPr>
-            <a:r>
-              <a:rPr lang="es-ES" sz="1800" dirty="0">
-                <a:solidFill>
-                  <a:schemeClr val="bg1">
-                    <a:lumMod val="50000"/>
-                  </a:schemeClr>
-                </a:solidFill>
-                <a:latin typeface="Josefin Sans" panose="00000500000000000000" pitchFamily="2" charset="0"/>
-              </a:rPr>
-              <a:t>(Tiempo sugerido: 1 minuto)</a:t>
-            </a:r>
-          </a:p>
-          <a:p>
-            <a:pPr algn="just">
+            <a:r>
+              <a:rPr lang="es-CO" sz="1600" b="1" dirty="0"/>
+              <a:t>Análisis de la Competencia en 5 Factores Clave</a:t>
+            </a:r>
+            <a:endParaRPr lang="es-CO" sz="1600" dirty="0"/>
+          </a:p>
+          <a:p>
+            <a:pPr>
               <a:lnSpc>
                 <a:spcPct val="107000"/>
               </a:lnSpc>
@@ -11186,6 +11472,135 @@
               </a:spcAft>
             </a:pPr>
             <a:endParaRPr lang="es-ES" dirty="0">
+              <a:solidFill>
+                <a:srgbClr val="4D4D4C"/>
+              </a:solidFill>
+              <a:latin typeface="Josefin Sans" panose="00000500000000000000" pitchFamily="2" charset="0"/>
+            </a:endParaRPr>
+          </a:p>
+          <a:p>
+            <a:pPr marL="342900" indent="-342900">
+              <a:lnSpc>
+                <a:spcPct val="100000"/>
+              </a:lnSpc>
+              <a:spcAft>
+                <a:spcPts val="800"/>
+              </a:spcAft>
+              <a:buAutoNum type="arabicPeriod"/>
+            </a:pPr>
+            <a:r>
+              <a:rPr lang="es-CO" sz="1400" b="1" dirty="0"/>
+              <a:t>Enfoque Preventivo:</a:t>
+            </a:r>
+            <a:r>
+              <a:rPr lang="es-CO" sz="1400" dirty="0"/>
+              <a:t> Los LMS tradicionales (Moodle, Q10) solo guardan notas del pasado; </a:t>
+            </a:r>
+            <a:r>
+              <a:rPr lang="es-CO" sz="1400" dirty="0" err="1"/>
+              <a:t>TalentLab</a:t>
+            </a:r>
+            <a:r>
+              <a:rPr lang="es-CO" sz="1400" dirty="0"/>
+              <a:t> predice el abandono a tiempo</a:t>
+            </a:r>
+          </a:p>
+          <a:p>
+            <a:pPr marL="342900" indent="-342900">
+              <a:lnSpc>
+                <a:spcPct val="100000"/>
+              </a:lnSpc>
+              <a:spcAft>
+                <a:spcPts val="800"/>
+              </a:spcAft>
+              <a:buAutoNum type="arabicPeriod"/>
+            </a:pPr>
+            <a:r>
+              <a:rPr lang="es-CO" sz="1400" dirty="0"/>
+              <a:t> </a:t>
+            </a:r>
+            <a:r>
+              <a:rPr lang="es-CO" sz="1400" b="1" dirty="0"/>
+              <a:t>Preparación Laboral:</a:t>
+            </a:r>
+            <a:r>
+              <a:rPr lang="es-CO" sz="1400" dirty="0"/>
+              <a:t> Plataformas globales de IA están en inglés y para multinacionales; </a:t>
+            </a:r>
+            <a:r>
+              <a:rPr lang="es-CO" sz="1400" dirty="0" err="1"/>
+              <a:t>TalentLab</a:t>
+            </a:r>
+            <a:r>
+              <a:rPr lang="es-CO" sz="1400" dirty="0"/>
+              <a:t> ofrece simulador en español adaptado al contexto local.</a:t>
+            </a:r>
+          </a:p>
+          <a:p>
+            <a:pPr marL="342900" indent="-342900">
+              <a:lnSpc>
+                <a:spcPct val="100000"/>
+              </a:lnSpc>
+              <a:spcAft>
+                <a:spcPts val="800"/>
+              </a:spcAft>
+              <a:buAutoNum type="arabicPeriod"/>
+            </a:pPr>
+            <a:r>
+              <a:rPr lang="es-CO" sz="1400" b="1" dirty="0"/>
+              <a:t>Estrategia de Precios:</a:t>
+            </a:r>
+            <a:r>
+              <a:rPr lang="es-CO" sz="1400" dirty="0"/>
+              <a:t> Soluciones internacionales cobran en dólares (+USD $5,000/año); </a:t>
+            </a:r>
+            <a:r>
+              <a:rPr lang="es-CO" sz="1400" dirty="0" err="1"/>
+              <a:t>TalentLab</a:t>
+            </a:r>
+            <a:r>
+              <a:rPr lang="es-CO" sz="1400" dirty="0"/>
+              <a:t> ofrece planes SaaS en pesos colombianos (desde $4.5M COP/año)</a:t>
+            </a:r>
+          </a:p>
+          <a:p>
+            <a:pPr marL="342900" indent="-342900">
+              <a:lnSpc>
+                <a:spcPct val="100000"/>
+              </a:lnSpc>
+              <a:spcAft>
+                <a:spcPts val="800"/>
+              </a:spcAft>
+              <a:buAutoNum type="arabicPeriod"/>
+            </a:pPr>
+            <a:r>
+              <a:rPr lang="es-CO" sz="1400" b="1" dirty="0"/>
+              <a:t>Segmentación de Mercado:</a:t>
+            </a:r>
+            <a:r>
+              <a:rPr lang="es-CO" sz="1400" dirty="0"/>
+              <a:t> Diseñado exclusivamente para instituciones técnicas y tecnológicas colombianas que no pueden pagar software costoso</a:t>
+            </a:r>
+          </a:p>
+          <a:p>
+            <a:pPr marL="342900" indent="-342900">
+              <a:lnSpc>
+                <a:spcPct val="100000"/>
+              </a:lnSpc>
+              <a:spcAft>
+                <a:spcPts val="800"/>
+              </a:spcAft>
+              <a:buAutoNum type="arabicPeriod"/>
+            </a:pPr>
+            <a:r>
+              <a:rPr lang="es-CO" sz="1400" b="1" dirty="0"/>
+              <a:t>Ubicación y Soporte:</a:t>
+            </a:r>
+            <a:r>
+              <a:rPr lang="es-CO" sz="1400" dirty="0"/>
+              <a:t> Acompañamiento e integración directa en Colombia frente al soporte remoto o inexistente de software extranjero.</a:t>
+            </a:r>
+            <a:endParaRPr lang="es-ES" sz="1400" dirty="0">
               <a:solidFill>
                 <a:srgbClr val="4D4D4C"/>
               </a:solidFill>
@@ -11352,7 +11767,7 @@
         </p:nvSpPr>
         <p:spPr>
           <a:xfrm>
-            <a:off x="1017165" y="877849"/>
+            <a:off x="590025" y="495294"/>
             <a:ext cx="6094602" cy="677108"/>
           </a:xfrm>
           <a:prstGeom prst="rect">
@@ -11418,8 +11833,8 @@
         </p:nvSpPr>
         <p:spPr>
           <a:xfrm>
-            <a:off x="950053" y="1794418"/>
-            <a:ext cx="6094602" cy="3843809"/>
+            <a:off x="419363" y="1324263"/>
+            <a:ext cx="6435926" cy="4524315"/>
           </a:xfrm>
           <a:prstGeom prst="rect">
             <a:avLst/>
@@ -11432,149 +11847,114 @@
           </a:bodyPr>
           <a:lstStyle/>
           <a:p>
-            <a:pPr algn="just">
-              <a:lnSpc>
-                <a:spcPct val="107000"/>
-              </a:lnSpc>
-              <a:spcAft>
-                <a:spcPts val="800"/>
-              </a:spcAft>
-            </a:pPr>
-            <a:r>
-              <a:rPr lang="es-ES" sz="1800" dirty="0">
-                <a:solidFill>
-                  <a:schemeClr val="bg1">
-                    <a:lumMod val="50000"/>
-                  </a:schemeClr>
-                </a:solidFill>
-                <a:latin typeface="Josefin Sans" panose="00000500000000000000" pitchFamily="2" charset="0"/>
-              </a:rPr>
-              <a:t>Describe la </a:t>
-            </a:r>
-            <a:r>
-              <a:rPr lang="es-ES" sz="1800" dirty="0">
-                <a:solidFill>
-                  <a:srgbClr val="00B050"/>
-                </a:solidFill>
-                <a:latin typeface="Josefin Sans" panose="00000500000000000000" pitchFamily="2" charset="0"/>
-              </a:rPr>
-              <a:t>estrategia de mercado y canales de venta </a:t>
-            </a:r>
-            <a:r>
-              <a:rPr lang="es-ES" sz="1800" dirty="0">
-                <a:solidFill>
-                  <a:schemeClr val="bg1">
-                    <a:lumMod val="50000"/>
-                  </a:schemeClr>
-                </a:solidFill>
-                <a:latin typeface="Josefin Sans" panose="00000500000000000000" pitchFamily="2" charset="0"/>
-              </a:rPr>
-              <a:t>destacando elementos como:</a:t>
-            </a:r>
-          </a:p>
-          <a:p>
-            <a:pPr algn="just">
-              <a:lnSpc>
-                <a:spcPct val="107000"/>
-              </a:lnSpc>
-              <a:spcAft>
-                <a:spcPts val="800"/>
-              </a:spcAft>
-            </a:pPr>
-            <a:r>
-              <a:rPr lang="es-ES" sz="1800" dirty="0">
-                <a:solidFill>
-                  <a:schemeClr val="bg1">
-                    <a:lumMod val="50000"/>
-                  </a:schemeClr>
-                </a:solidFill>
-                <a:latin typeface="Josefin Sans" panose="00000500000000000000" pitchFamily="2" charset="0"/>
-              </a:rPr>
-              <a:t>¿Quién es mi cliente?</a:t>
-            </a:r>
-          </a:p>
-          <a:p>
-            <a:pPr algn="just">
-              <a:lnSpc>
-                <a:spcPct val="107000"/>
-              </a:lnSpc>
-              <a:spcAft>
-                <a:spcPts val="800"/>
-              </a:spcAft>
-            </a:pPr>
-            <a:r>
-              <a:rPr lang="es-ES" sz="1800" dirty="0">
-                <a:solidFill>
-                  <a:schemeClr val="bg1">
-                    <a:lumMod val="50000"/>
-                  </a:schemeClr>
-                </a:solidFill>
-                <a:latin typeface="Josefin Sans" panose="00000500000000000000" pitchFamily="2" charset="0"/>
-              </a:rPr>
-              <a:t>¿Cómo me integro a sus hábitos de vida (Gustos y Preferencias) para definir los canales de comunicación  y publicidad?</a:t>
-            </a:r>
-          </a:p>
-          <a:p>
-            <a:pPr algn="just">
-              <a:lnSpc>
-                <a:spcPct val="107000"/>
-              </a:lnSpc>
-              <a:spcAft>
-                <a:spcPts val="800"/>
-              </a:spcAft>
-            </a:pPr>
-            <a:r>
-              <a:rPr lang="es-ES" sz="1800" dirty="0">
-                <a:solidFill>
-                  <a:schemeClr val="bg1">
-                    <a:lumMod val="50000"/>
-                  </a:schemeClr>
-                </a:solidFill>
-                <a:latin typeface="Josefin Sans" panose="00000500000000000000" pitchFamily="2" charset="0"/>
-              </a:rPr>
-              <a:t>¿Cuáles serán los canales por los que se realizarán mis ventas?</a:t>
-            </a:r>
-          </a:p>
-          <a:p>
-            <a:pPr algn="just">
-              <a:lnSpc>
-                <a:spcPct val="107000"/>
-              </a:lnSpc>
-              <a:spcAft>
-                <a:spcPts val="800"/>
-              </a:spcAft>
-            </a:pPr>
-            <a:r>
-              <a:rPr lang="es-ES" sz="1800" dirty="0">
-                <a:solidFill>
-                  <a:schemeClr val="bg1">
-                    <a:lumMod val="50000"/>
-                  </a:schemeClr>
-                </a:solidFill>
-                <a:latin typeface="Josefin Sans" panose="00000500000000000000" pitchFamily="2" charset="0"/>
-              </a:rPr>
-              <a:t>¿Cómo aporta cada uno de los canales en las ventas totales?</a:t>
-            </a:r>
-          </a:p>
-          <a:p>
-            <a:pPr algn="just">
-              <a:lnSpc>
-                <a:spcPct val="107000"/>
-              </a:lnSpc>
-              <a:spcAft>
-                <a:spcPts val="800"/>
-              </a:spcAft>
-            </a:pPr>
-            <a:r>
-              <a:rPr lang="es-ES" sz="1800" dirty="0">
-                <a:solidFill>
-                  <a:schemeClr val="bg1">
-                    <a:lumMod val="50000"/>
-                  </a:schemeClr>
-                </a:solidFill>
-                <a:latin typeface="Josefin Sans" panose="00000500000000000000" pitchFamily="2" charset="0"/>
-              </a:rPr>
-              <a:t>(Tiempo sugerido: 1 minuto)</a:t>
+            <a:r>
+              <a:rPr lang="es-CO" b="1" dirty="0"/>
+              <a:t>Estrategia Comercial y Canales de Venta B2B</a:t>
+            </a:r>
+          </a:p>
+          <a:p>
+            <a:endParaRPr lang="es-CO" b="1" dirty="0"/>
+          </a:p>
+          <a:p>
+            <a:r>
+              <a:rPr lang="es-CO" dirty="0"/>
+              <a:t>• </a:t>
+            </a:r>
+            <a:r>
+              <a:rPr lang="es-CO" b="1" dirty="0"/>
+              <a:t>Cliente Decisor:</a:t>
+            </a:r>
+            <a:r>
+              <a:rPr lang="es-CO" dirty="0"/>
+              <a:t> Directores de Bienestar y Rectores de instituciones técnicas</a:t>
+            </a:r>
+          </a:p>
+          <a:p>
+            <a:br>
+              <a:rPr lang="es-CO" dirty="0"/>
+            </a:br>
+            <a:r>
+              <a:rPr lang="es-CO" dirty="0"/>
+              <a:t>• </a:t>
+            </a:r>
+            <a:r>
+              <a:rPr lang="es-CO" b="1" dirty="0"/>
+              <a:t>Canal de Contacto:</a:t>
+            </a:r>
+            <a:r>
+              <a:rPr lang="es-CO" dirty="0"/>
+              <a:t> Redes profesionales (</a:t>
+            </a:r>
+            <a:r>
+              <a:rPr lang="es-CO" b="1" dirty="0"/>
+              <a:t>LinkedIn</a:t>
+            </a:r>
+            <a:r>
+              <a:rPr lang="es-CO" dirty="0"/>
+              <a:t>), foros educativos y </a:t>
+            </a:r>
+            <a:r>
+              <a:rPr lang="es-CO" dirty="0" err="1"/>
+              <a:t>webinars</a:t>
+            </a:r>
+            <a:r>
+              <a:rPr lang="es-CO" dirty="0"/>
+              <a:t> sobre deserción</a:t>
+            </a:r>
+          </a:p>
+          <a:p>
+            <a:br>
+              <a:rPr lang="es-CO" dirty="0"/>
+            </a:br>
+            <a:r>
+              <a:rPr lang="es-CO" dirty="0"/>
+              <a:t>• </a:t>
+            </a:r>
+            <a:r>
+              <a:rPr lang="es-CO" b="1" dirty="0"/>
+              <a:t>Venta Directa B2B (70% de ventas):</a:t>
+            </a:r>
+            <a:r>
+              <a:rPr lang="es-CO" dirty="0"/>
+              <a:t> Reuniones ejecutivas con demostración del prototipo en vivo</a:t>
+            </a:r>
+          </a:p>
+          <a:p>
+            <a:br>
+              <a:rPr lang="es-CO" dirty="0"/>
+            </a:br>
+            <a:r>
+              <a:rPr lang="es-CO" dirty="0"/>
+              <a:t>• </a:t>
+            </a:r>
+            <a:r>
+              <a:rPr lang="es-CO" b="1" dirty="0" err="1"/>
+              <a:t>Inbound</a:t>
+            </a:r>
+            <a:r>
+              <a:rPr lang="es-CO" b="1" dirty="0"/>
+              <a:t> Marketing y Alianzas (30% de ventas):</a:t>
+            </a:r>
+            <a:r>
+              <a:rPr lang="es-CO" dirty="0"/>
+              <a:t> Artículos técnicos y convenios con redes educativas (ACIET)</a:t>
+            </a:r>
+          </a:p>
+          <a:p>
+            <a:br>
+              <a:rPr lang="es-CO" dirty="0"/>
+            </a:br>
+            <a:r>
+              <a:rPr lang="es-CO" dirty="0"/>
+              <a:t>• </a:t>
+            </a:r>
+            <a:r>
+              <a:rPr lang="es-CO" b="1" dirty="0"/>
+              <a:t>Canal Social Freemium:</a:t>
+            </a:r>
+            <a:r>
+              <a:rPr lang="es-CO" dirty="0"/>
+              <a:t> Acceso libre para colegios públicos como motor de visibilidad de marca</a:t>
             </a:r>
           </a:p>
         </p:txBody>
@@ -11983,15 +12363,6 @@
 </file>
 
 <file path=customXml/item1.xml><?xml version="1.0" encoding="utf-8"?>
-<?mso-contentType ?>
-<FormTemplates xmlns="http://schemas.microsoft.com/sharepoint/v3/contenttype/forms">
-  <Display>DocumentLibraryForm</Display>
-  <Edit>DocumentLibraryForm</Edit>
-  <New>DocumentLibraryForm</New>
-</FormTemplates>
-</file>
-
-<file path=customXml/item2.xml><?xml version="1.0" encoding="utf-8"?>
 <p:properties xmlns:p="http://schemas.microsoft.com/office/2006/metadata/properties" xmlns:xsi="http://www.w3.org/2001/XMLSchema-instance" xmlns:pc="http://schemas.microsoft.com/office/infopath/2007/PartnerControls">
   <documentManagement>
     <_ip_UnifiedCompliancePolicyUIAction xmlns="http://schemas.microsoft.com/sharepoint/v3" xsi:nil="true"/>
@@ -12004,6 +12375,15 @@
     <FechayHora xmlns="edbb1c21-1b45-407e-8894-c97732534993" xsi:nil="true"/>
   </documentManagement>
 </p:properties>
+</file>
+
+<file path=customXml/item2.xml><?xml version="1.0" encoding="utf-8"?>
+<?mso-contentType ?>
+<FormTemplates xmlns="http://schemas.microsoft.com/sharepoint/v3/contenttype/forms">
+  <Display>DocumentLibraryForm</Display>
+  <Edit>DocumentLibraryForm</Edit>
+  <New>DocumentLibraryForm</New>
+</FormTemplates>
 </file>
 
 <file path=customXml/item3.xml><?xml version="1.0" encoding="utf-8"?>
@@ -12297,14 +12677,6 @@
 </file>
 
 <file path=customXml/itemProps1.xml><?xml version="1.0" encoding="utf-8"?>
-<ds:datastoreItem xmlns:ds="http://schemas.openxmlformats.org/officeDocument/2006/customXml" ds:itemID="{24793A44-C896-41D7-AA95-258C41799BE5}">
-  <ds:schemaRefs>
-    <ds:schemaRef ds:uri="http://schemas.microsoft.com/sharepoint/v3/contenttype/forms"/>
-  </ds:schemaRefs>
-</ds:datastoreItem>
-</file>
-
-<file path=customXml/itemProps2.xml><?xml version="1.0" encoding="utf-8"?>
 <ds:datastoreItem xmlns:ds="http://schemas.openxmlformats.org/officeDocument/2006/customXml" ds:itemID="{E607C22C-0ADE-4E74-9F22-92A5F804D7D0}">
   <ds:schemaRefs>
     <ds:schemaRef ds:uri="http://schemas.microsoft.com/sharepoint/v3"/>
@@ -12318,6 +12690,14 @@
     <ds:schemaRef ds:uri="http://schemas.microsoft.com/office/infopath/2007/PartnerControls"/>
     <ds:schemaRef ds:uri="41dd0a9e-964d-48c8-9389-7445c2a187f7"/>
     <ds:schemaRef ds:uri="http://purl.org/dc/dcmitype/"/>
+  </ds:schemaRefs>
+</ds:datastoreItem>
+</file>
+
+<file path=customXml/itemProps2.xml><?xml version="1.0" encoding="utf-8"?>
+<ds:datastoreItem xmlns:ds="http://schemas.openxmlformats.org/officeDocument/2006/customXml" ds:itemID="{24793A44-C896-41D7-AA95-258C41799BE5}">
+  <ds:schemaRefs>
+    <ds:schemaRef ds:uri="http://schemas.microsoft.com/sharepoint/v3/contenttype/forms"/>
   </ds:schemaRefs>
 </ds:datastoreItem>
 </file>
